--- a/docs/NeuroLens_Pitch_Deck.pptx
+++ b/docs/NeuroLens_Pitch_Deck.pptx
@@ -3093,7 +3093,7 @@
     <p:bg>
       <p:bgPr>
         <a:solidFill>
-          <a:srgbClr val="101828"/>
+          <a:srgbClr val="0B1F33"/>
         </a:solidFill>
         <a:effectLst/>
       </p:bgPr>
@@ -3113,8 +3113,8 @@
         </p:nvSpPr>
         <p:spPr>
           <a:xfrm>
-            <a:off x="914400" y="2011680"/>
-            <a:ext cx="10332720" cy="2926080"/>
+            <a:off x="822960" y="1828800"/>
+            <a:ext cx="10515600" cy="1280160"/>
           </a:xfrm>
           <a:prstGeom prst="rect">
             <a:avLst/>
@@ -3122,65 +3122,125 @@
           <a:noFill/>
         </p:spPr>
         <p:txBody>
-          <a:bodyPr wrap="square">
+          <a:bodyPr wrap="square" anchor="t" lIns="0" tIns="0" rIns="0" bIns="0">
             <a:spAutoFit/>
           </a:bodyPr>
           <a:lstStyle/>
           <a:p>
-            <a:pPr>
-              <a:defRPr sz="5400" b="1">
+            <a:pPr algn="l"/>
+            <a:r>
+              <a:rPr sz="6600" b="1" i="0">
                 <a:solidFill>
                   <a:srgbClr val="FFFFFF"/>
                 </a:solidFill>
-              </a:defRPr>
-            </a:pPr>
-            <a:r>
+                <a:latin typeface="Cambria"/>
+              </a:rPr>
               <a:t>NeuroLens</a:t>
             </a:r>
           </a:p>
-          <a:p>
-            <a:pPr>
-              <a:spcBef>
-                <a:spcPts val="1000"/>
-              </a:spcBef>
-              <a:defRPr sz="2400">
-                <a:solidFill>
-                  <a:srgbClr val="027AFF"/>
-                </a:solidFill>
-              </a:defRPr>
-            </a:pPr>
-            <a:r>
-              <a:t>Private, Real-Time AI for Cognitive Accessibility</a:t>
-            </a:r>
-          </a:p>
-          <a:p>
-            <a:pPr>
-              <a:spcBef>
-                <a:spcPts val="1400"/>
-              </a:spcBef>
-              <a:defRPr sz="1600" i="1">
-                <a:solidFill>
-                  <a:srgbClr val="C8D2E1"/>
-                </a:solidFill>
-              </a:defRPr>
-            </a:pPr>
-            <a:r>
-              <a:t>"Understand the moment. Organize the thought. Keep everything private."</a:t>
-            </a:r>
-          </a:p>
-          <a:p>
-            <a:pPr>
-              <a:spcBef>
-                <a:spcPts val="2400"/>
-              </a:spcBef>
-              <a:defRPr sz="1300" b="1">
-                <a:solidFill>
-                  <a:srgbClr val="E02020"/>
-                </a:solidFill>
-              </a:defRPr>
-            </a:pPr>
-            <a:r>
-              <a:t>Snapdragon® AI Lab Build &amp; Present Challenge 2026 | Optimized for Snapdragon-Powered HP PCs</a:t>
+        </p:txBody>
+      </p:sp>
+      <p:sp>
+        <p:nvSpPr>
+          <p:cNvPr id="3" name="TextBox 2"/>
+          <p:cNvSpPr txBox="1"/>
+          <p:nvPr/>
+        </p:nvSpPr>
+        <p:spPr>
+          <a:xfrm>
+            <a:off x="822960" y="3108960"/>
+            <a:ext cx="10515600" cy="640080"/>
+          </a:xfrm>
+          <a:prstGeom prst="rect">
+            <a:avLst/>
+          </a:prstGeom>
+          <a:noFill/>
+        </p:spPr>
+        <p:txBody>
+          <a:bodyPr wrap="square" anchor="t" lIns="0" tIns="0" rIns="0" bIns="0">
+            <a:spAutoFit/>
+          </a:bodyPr>
+          <a:lstStyle/>
+          <a:p>
+            <a:pPr algn="l"/>
+            <a:r>
+              <a:rPr sz="2600" b="0" i="0">
+                <a:solidFill>
+                  <a:srgbClr val="F2B134"/>
+                </a:solidFill>
+                <a:latin typeface="Calibri"/>
+              </a:rPr>
+              <a:t>Private, real-time AI for cognitive accessibility</a:t>
+            </a:r>
+          </a:p>
+        </p:txBody>
+      </p:sp>
+      <p:sp>
+        <p:nvSpPr>
+          <p:cNvPr id="4" name="TextBox 3"/>
+          <p:cNvSpPr txBox="1"/>
+          <p:nvPr/>
+        </p:nvSpPr>
+        <p:spPr>
+          <a:xfrm>
+            <a:off x="822960" y="3931920"/>
+            <a:ext cx="10515600" cy="548640"/>
+          </a:xfrm>
+          <a:prstGeom prst="rect">
+            <a:avLst/>
+          </a:prstGeom>
+          <a:noFill/>
+        </p:spPr>
+        <p:txBody>
+          <a:bodyPr wrap="square" anchor="t" lIns="0" tIns="0" rIns="0" bIns="0">
+            <a:spAutoFit/>
+          </a:bodyPr>
+          <a:lstStyle/>
+          <a:p>
+            <a:pPr algn="l"/>
+            <a:r>
+              <a:rPr sz="1800" b="0" i="1">
+                <a:solidFill>
+                  <a:srgbClr val="C9D6E3"/>
+                </a:solidFill>
+                <a:latin typeface="Calibri"/>
+              </a:rPr>
+              <a:t>Understand the moment. Organize the thought. Keep everything private.</a:t>
+            </a:r>
+          </a:p>
+        </p:txBody>
+      </p:sp>
+      <p:sp>
+        <p:nvSpPr>
+          <p:cNvPr id="5" name="TextBox 4"/>
+          <p:cNvSpPr txBox="1"/>
+          <p:nvPr/>
+        </p:nvSpPr>
+        <p:spPr>
+          <a:xfrm>
+            <a:off x="822960" y="5669280"/>
+            <a:ext cx="10515600" cy="548640"/>
+          </a:xfrm>
+          <a:prstGeom prst="rect">
+            <a:avLst/>
+          </a:prstGeom>
+          <a:noFill/>
+        </p:spPr>
+        <p:txBody>
+          <a:bodyPr wrap="square" anchor="t" lIns="0" tIns="0" rIns="0" bIns="0">
+            <a:spAutoFit/>
+          </a:bodyPr>
+          <a:lstStyle/>
+          <a:p>
+            <a:pPr algn="l"/>
+            <a:r>
+              <a:rPr sz="1400" b="0" i="0">
+                <a:solidFill>
+                  <a:srgbClr val="C9D6E3"/>
+                </a:solidFill>
+                <a:latin typeface="Calibri"/>
+              </a:rPr>
+              <a:t>Snapdragon® AI Lab Build &amp; Present Challenge 2026   |   Swati Dubey   |   Proposal + tested prototype</a:t>
             </a:r>
           </a:p>
         </p:txBody>
@@ -3199,7 +3259,7 @@
     <p:bg>
       <p:bgPr>
         <a:solidFill>
-          <a:srgbClr val="101828"/>
+          <a:srgbClr val="0B1F33"/>
         </a:solidFill>
         <a:effectLst/>
       </p:bgPr>
@@ -3219,8 +3279,8 @@
         </p:nvSpPr>
         <p:spPr>
           <a:xfrm>
-            <a:off x="731520" y="914400"/>
-            <a:ext cx="10698480" cy="5303520"/>
+            <a:off x="640080" y="457200"/>
+            <a:ext cx="10881360" cy="822960"/>
           </a:xfrm>
           <a:prstGeom prst="rect">
             <a:avLst/>
@@ -3228,104 +3288,377 @@
           <a:noFill/>
         </p:spPr>
         <p:txBody>
-          <a:bodyPr wrap="square">
+          <a:bodyPr wrap="square" anchor="ctr" lIns="0" tIns="0" rIns="0" bIns="0">
             <a:spAutoFit/>
           </a:bodyPr>
           <a:lstStyle/>
           <a:p>
-            <a:pPr>
-              <a:defRPr sz="3200" b="1">
+            <a:pPr algn="l"/>
+            <a:r>
+              <a:rPr sz="3400" b="1" i="0">
                 <a:solidFill>
                   <a:srgbClr val="FFFFFF"/>
                 </a:solidFill>
-              </a:defRPr>
+                <a:latin typeface="Cambria"/>
+              </a:rPr>
+              <a:t>Where it stands and what comes next</a:t>
+            </a:r>
+          </a:p>
+        </p:txBody>
+      </p:sp>
+      <p:sp>
+        <p:nvSpPr>
+          <p:cNvPr id="3" name="Rounded Rectangle 2"/>
+          <p:cNvSpPr/>
+          <p:nvPr/>
+        </p:nvSpPr>
+        <p:spPr>
+          <a:xfrm>
+            <a:off x="640080" y="1737360"/>
+            <a:ext cx="3520440" cy="3566160"/>
+          </a:xfrm>
+          <a:prstGeom prst="roundRect">
+            <a:avLst>
+              <a:gd name="adj" fmla="val 6000"/>
+            </a:avLst>
+          </a:prstGeom>
+          <a:solidFill>
+            <a:srgbClr val="0E8F83"/>
+          </a:solidFill>
+          <a:ln>
+            <a:noFill/>
+          </a:ln>
+          <a:effectLst/>
+        </p:spPr>
+        <p:style>
+          <a:lnRef idx="1">
+            <a:schemeClr val="accent1"/>
+          </a:lnRef>
+          <a:fillRef idx="3">
+            <a:schemeClr val="accent1"/>
+          </a:fillRef>
+          <a:effectRef idx="2">
+            <a:schemeClr val="accent1"/>
+          </a:effectRef>
+          <a:fontRef idx="minor">
+            <a:schemeClr val="lt1"/>
+          </a:fontRef>
+        </p:style>
+        <p:txBody>
+          <a:bodyPr rtlCol="0" anchor="t" wrap="square" lIns="320040" tIns="274320" rIns="274320" bIns="274320"/>
+          <a:lstStyle/>
+          <a:p>
+            <a:pPr algn="l"/>
+            <a:r>
+              <a:rPr sz="2600" b="1" i="0">
+                <a:solidFill>
+                  <a:srgbClr val="FFFFFF"/>
+                </a:solidFill>
+                <a:latin typeface="Cambria"/>
+              </a:rPr>
+              <a:t>Done</a:t>
+            </a:r>
+          </a:p>
+          <a:p>
+            <a:pPr algn="l">
+              <a:spcBef>
+                <a:spcPts val="600"/>
+              </a:spcBef>
             </a:pPr>
             <a:r>
-              <a:t>Roadmap &amp; The Snapdragon® Advantage</a:t>
-            </a:r>
-          </a:p>
-          <a:p>
-            <a:br/>
-            <a:pPr>
-              <a:defRPr b="1" sz="1600">
-                <a:solidFill>
-                  <a:srgbClr val="027AFF"/>
-                </a:solidFill>
-              </a:defRPr>
+              <a:rPr sz="1600" b="0" i="0">
+                <a:solidFill>
+                  <a:srgbClr val="FFFFFF"/>
+                </a:solidFill>
+                <a:latin typeface="Calibri"/>
+              </a:rPr>
+              <a:t>•  Structured-output schema</a:t>
+            </a:r>
+          </a:p>
+          <a:p>
+            <a:pPr algn="l">
+              <a:spcBef>
+                <a:spcPts val="600"/>
+              </a:spcBef>
             </a:pPr>
             <a:r>
-              <a:t>✔ Phase 1 (Completed Prototype): </a:t>
-            </a:r>
-            <a:r>
-              <a:rPr b="0">
-                <a:solidFill>
-                  <a:srgbClr val="DCE6F2"/>
-                </a:solidFill>
-              </a:rPr>
-              <a:t>Pydantic-validated Cognitive Compiler, hybrid deadline engine, ambiguity detector, and multi-scenario verification.</a:t>
-            </a:r>
-          </a:p>
-          <a:p>
-            <a:br/>
-            <a:pPr>
-              <a:defRPr b="1" sz="1600">
-                <a:solidFill>
-                  <a:srgbClr val="027AFF"/>
-                </a:solidFill>
-              </a:defRPr>
+              <a:rPr sz="1600" b="0" i="0">
+                <a:solidFill>
+                  <a:srgbClr val="FFFFFF"/>
+                </a:solidFill>
+                <a:latin typeface="Calibri"/>
+              </a:rPr>
+              <a:t>•  Rule-based compiler</a:t>
+            </a:r>
+          </a:p>
+          <a:p>
+            <a:pPr algn="l">
+              <a:spcBef>
+                <a:spcPts val="600"/>
+              </a:spcBef>
             </a:pPr>
             <a:r>
-              <a:t>✔ Phase 2 (Hackathon MVP): </a:t>
-            </a:r>
-            <a:r>
-              <a:rPr b="0">
-                <a:solidFill>
-                  <a:srgbClr val="DCE6F2"/>
-                </a:solidFill>
-              </a:rPr>
-              <a:t>Streamlit calm UI integration, live Whisper-Base microphone ingestion, and GenieX local server binding on Snapdragon X PC.</a:t>
-            </a:r>
-          </a:p>
-          <a:p>
-            <a:br/>
-            <a:pPr>
-              <a:defRPr b="1" sz="1600">
-                <a:solidFill>
-                  <a:srgbClr val="027AFF"/>
-                </a:solidFill>
-              </a:defRPr>
+              <a:rPr sz="1600" b="0" i="0">
+                <a:solidFill>
+                  <a:srgbClr val="FFFFFF"/>
+                </a:solidFill>
+                <a:latin typeface="Calibri"/>
+              </a:rPr>
+              <a:t>•  Model client with validation and fallback</a:t>
+            </a:r>
+          </a:p>
+          <a:p>
+            <a:pPr algn="l">
+              <a:spcBef>
+                <a:spcPts val="600"/>
+              </a:spcBef>
             </a:pPr>
             <a:r>
-              <a:t>✔ Phase 3 (Multimodal Extension): </a:t>
-            </a:r>
-            <a:r>
-              <a:rPr b="0">
-                <a:solidFill>
-                  <a:srgbClr val="DCE6F2"/>
-                </a:solidFill>
-              </a:rPr>
-              <a:t>Qwen3-VL ContextLens for instant slide/document region understanding.</a:t>
-            </a:r>
-          </a:p>
-          <a:p>
-            <a:br/>
-            <a:pPr>
-              <a:defRPr b="1" sz="1600">
-                <a:solidFill>
-                  <a:srgbClr val="027AFF"/>
-                </a:solidFill>
-              </a:defRPr>
+              <a:rPr sz="1600" b="0" i="0">
+                <a:solidFill>
+                  <a:srgbClr val="FFFFFF"/>
+                </a:solidFill>
+                <a:latin typeface="Calibri"/>
+              </a:rPr>
+              <a:t>•  16 unit tests</a:t>
+            </a:r>
+          </a:p>
+        </p:txBody>
+      </p:sp>
+      <p:sp>
+        <p:nvSpPr>
+          <p:cNvPr id="4" name="Rounded Rectangle 3"/>
+          <p:cNvSpPr/>
+          <p:nvPr/>
+        </p:nvSpPr>
+        <p:spPr>
+          <a:xfrm>
+            <a:off x="4315968" y="1737360"/>
+            <a:ext cx="3520440" cy="3566160"/>
+          </a:xfrm>
+          <a:prstGeom prst="roundRect">
+            <a:avLst>
+              <a:gd name="adj" fmla="val 6000"/>
+            </a:avLst>
+          </a:prstGeom>
+          <a:solidFill>
+            <a:srgbClr val="F2B134"/>
+          </a:solidFill>
+          <a:ln>
+            <a:noFill/>
+          </a:ln>
+          <a:effectLst/>
+        </p:spPr>
+        <p:style>
+          <a:lnRef idx="1">
+            <a:schemeClr val="accent1"/>
+          </a:lnRef>
+          <a:fillRef idx="3">
+            <a:schemeClr val="accent1"/>
+          </a:fillRef>
+          <a:effectRef idx="2">
+            <a:schemeClr val="accent1"/>
+          </a:effectRef>
+          <a:fontRef idx="minor">
+            <a:schemeClr val="lt1"/>
+          </a:fontRef>
+        </p:style>
+        <p:txBody>
+          <a:bodyPr rtlCol="0" anchor="t" wrap="square" lIns="320040" tIns="274320" rIns="274320" bIns="274320"/>
+          <a:lstStyle/>
+          <a:p>
+            <a:pPr algn="l"/>
+            <a:r>
+              <a:rPr sz="2600" b="1" i="0">
+                <a:solidFill>
+                  <a:srgbClr val="1B2A3A"/>
+                </a:solidFill>
+                <a:latin typeface="Cambria"/>
+              </a:rPr>
+              <a:t>Next</a:t>
+            </a:r>
+          </a:p>
+          <a:p>
+            <a:pPr algn="l">
+              <a:spcBef>
+                <a:spcPts val="600"/>
+              </a:spcBef>
             </a:pPr>
             <a:r>
-              <a:t>✔ Long-term Vision: </a:t>
-            </a:r>
-            <a:r>
-              <a:rPr b="0">
-                <a:solidFill>
-                  <a:srgbClr val="DCE6F2"/>
-                </a:solidFill>
-              </a:rPr>
-              <a:t>Empowering millions of neurodivergent users and professionals with private, on-device cognitive augmentation powered by Qualcomm Snapdragon.</a:t>
+              <a:rPr sz="1600" b="0" i="0">
+                <a:solidFill>
+                  <a:srgbClr val="1B2A3A"/>
+                </a:solidFill>
+                <a:latin typeface="Calibri"/>
+              </a:rPr>
+              <a:t>•  Run GenieX + Qwen3 on my laptop</a:t>
+            </a:r>
+          </a:p>
+          <a:p>
+            <a:pPr algn="l">
+              <a:spcBef>
+                <a:spcPts val="600"/>
+              </a:spcBef>
+            </a:pPr>
+            <a:r>
+              <a:rPr sz="1600" b="0" i="0">
+                <a:solidFill>
+                  <a:srgbClr val="1B2A3A"/>
+                </a:solidFill>
+                <a:latin typeface="Calibri"/>
+              </a:rPr>
+              <a:t>•  Whisper-Base on audio</a:t>
+            </a:r>
+          </a:p>
+          <a:p>
+            <a:pPr algn="l">
+              <a:spcBef>
+                <a:spcPts val="600"/>
+              </a:spcBef>
+            </a:pPr>
+            <a:r>
+              <a:rPr sz="1600" b="0" i="0">
+                <a:solidFill>
+                  <a:srgbClr val="1B2A3A"/>
+                </a:solidFill>
+                <a:latin typeface="Calibri"/>
+              </a:rPr>
+              <a:t>•  Task creation, Focus Mode, simple UI</a:t>
+            </a:r>
+          </a:p>
+          <a:p>
+            <a:pPr algn="l">
+              <a:spcBef>
+                <a:spcPts val="600"/>
+              </a:spcBef>
+            </a:pPr>
+            <a:r>
+              <a:rPr sz="1600" b="0" i="0">
+                <a:solidFill>
+                  <a:srgbClr val="1B2A3A"/>
+                </a:solidFill>
+                <a:latin typeface="Calibri"/>
+              </a:rPr>
+              <a:t>•  Screenshot input with Qwen3-VL</a:t>
+            </a:r>
+          </a:p>
+        </p:txBody>
+      </p:sp>
+      <p:sp>
+        <p:nvSpPr>
+          <p:cNvPr id="5" name="Rounded Rectangle 4"/>
+          <p:cNvSpPr/>
+          <p:nvPr/>
+        </p:nvSpPr>
+        <p:spPr>
+          <a:xfrm>
+            <a:off x="7991855" y="1737360"/>
+            <a:ext cx="3520440" cy="3566160"/>
+          </a:xfrm>
+          <a:prstGeom prst="roundRect">
+            <a:avLst>
+              <a:gd name="adj" fmla="val 6000"/>
+            </a:avLst>
+          </a:prstGeom>
+          <a:solidFill>
+            <a:srgbClr val="FFFFFF"/>
+          </a:solidFill>
+          <a:ln>
+            <a:noFill/>
+          </a:ln>
+          <a:effectLst/>
+        </p:spPr>
+        <p:style>
+          <a:lnRef idx="1">
+            <a:schemeClr val="accent1"/>
+          </a:lnRef>
+          <a:fillRef idx="3">
+            <a:schemeClr val="accent1"/>
+          </a:fillRef>
+          <a:effectRef idx="2">
+            <a:schemeClr val="accent1"/>
+          </a:effectRef>
+          <a:fontRef idx="minor">
+            <a:schemeClr val="lt1"/>
+          </a:fontRef>
+        </p:style>
+        <p:txBody>
+          <a:bodyPr rtlCol="0" anchor="t" wrap="square" lIns="320040" tIns="274320" rIns="274320" bIns="274320"/>
+          <a:lstStyle/>
+          <a:p>
+            <a:pPr algn="l"/>
+            <a:r>
+              <a:rPr sz="2600" b="1" i="0">
+                <a:solidFill>
+                  <a:srgbClr val="1B2A3A"/>
+                </a:solidFill>
+                <a:latin typeface="Cambria"/>
+              </a:rPr>
+              <a:t>To measure</a:t>
+            </a:r>
+          </a:p>
+          <a:p>
+            <a:pPr algn="l">
+              <a:spcBef>
+                <a:spcPts val="600"/>
+              </a:spcBef>
+            </a:pPr>
+            <a:r>
+              <a:rPr sz="1600" b="0" i="0">
+                <a:solidFill>
+                  <a:srgbClr val="1B2A3A"/>
+                </a:solidFill>
+                <a:latin typeface="Calibri"/>
+              </a:rPr>
+              <a:t>•  Task and deadline accuracy on ~30 labelled samples</a:t>
+            </a:r>
+          </a:p>
+          <a:p>
+            <a:pPr algn="l">
+              <a:spcBef>
+                <a:spcPts val="600"/>
+              </a:spcBef>
+            </a:pPr>
+            <a:r>
+              <a:rPr sz="1600" b="0" i="0">
+                <a:solidFill>
+                  <a:srgbClr val="1B2A3A"/>
+                </a:solidFill>
+                <a:latin typeface="Calibri"/>
+              </a:rPr>
+              <a:t>•  Latency: ASR, first token, end to end</a:t>
+            </a:r>
+          </a:p>
+          <a:p>
+            <a:pPr algn="l">
+              <a:spcBef>
+                <a:spcPts val="600"/>
+              </a:spcBef>
+            </a:pPr>
+            <a:r>
+              <a:rPr sz="1600" b="0" i="0">
+                <a:solidFill>
+                  <a:srgbClr val="1B2A3A"/>
+                </a:solidFill>
+                <a:latin typeface="Calibri"/>
+              </a:rPr>
+              <a:t>•  CPU vs NPU</a:t>
+            </a:r>
+          </a:p>
+          <a:p>
+            <a:pPr algn="l">
+              <a:spcBef>
+                <a:spcPts val="600"/>
+              </a:spcBef>
+            </a:pPr>
+            <a:r>
+              <a:rPr sz="1600" b="0" i="0">
+                <a:solidFill>
+                  <a:srgbClr val="1B2A3A"/>
+                </a:solidFill>
+                <a:latin typeface="Calibri"/>
+              </a:rPr>
+              <a:t>•  Offline test</a:t>
             </a:r>
           </a:p>
         </p:txBody>
@@ -3344,7 +3677,7 @@
     <p:bg>
       <p:bgPr>
         <a:solidFill>
-          <a:srgbClr val="F8FAFC"/>
+          <a:srgbClr val="F5F7FA"/>
         </a:solidFill>
         <a:effectLst/>
       </p:bgPr>
@@ -3364,8 +3697,8 @@
         </p:nvSpPr>
         <p:spPr>
           <a:xfrm>
-            <a:off x="731520" y="457200"/>
-            <a:ext cx="10698480" cy="1097280"/>
+            <a:off x="640080" y="457200"/>
+            <a:ext cx="10881360" cy="822960"/>
           </a:xfrm>
           <a:prstGeom prst="rect">
             <a:avLst/>
@@ -3373,46 +3706,240 @@
           <a:noFill/>
         </p:spPr>
         <p:txBody>
-          <a:bodyPr wrap="square" lIns="0" tIns="0" rIns="0" bIns="0">
+          <a:bodyPr wrap="square" anchor="ctr" lIns="0" tIns="0" rIns="0" bIns="0">
             <a:spAutoFit/>
           </a:bodyPr>
           <a:lstStyle/>
           <a:p>
-            <a:pPr>
-              <a:defRPr sz="1100" b="1">
-                <a:solidFill>
-                  <a:srgbClr val="E02020"/>
-                </a:solidFill>
-              </a:defRPr>
+            <a:pPr algn="l"/>
+            <a:r>
+              <a:rPr sz="3400" b="1" i="0">
+                <a:solidFill>
+                  <a:srgbClr val="0B1F33"/>
+                </a:solidFill>
+                <a:latin typeface="Cambria"/>
+              </a:rPr>
+              <a:t>Fast, indirect communication hides the real task</a:t>
+            </a:r>
+          </a:p>
+        </p:txBody>
+      </p:sp>
+      <p:sp>
+        <p:nvSpPr>
+          <p:cNvPr id="3" name="Rounded Rectangle 2"/>
+          <p:cNvSpPr/>
+          <p:nvPr/>
+        </p:nvSpPr>
+        <p:spPr>
+          <a:xfrm>
+            <a:off x="640080" y="1737360"/>
+            <a:ext cx="5486400" cy="3566160"/>
+          </a:xfrm>
+          <a:prstGeom prst="roundRect">
+            <a:avLst>
+              <a:gd name="adj" fmla="val 6000"/>
+            </a:avLst>
+          </a:prstGeom>
+          <a:solidFill>
+            <a:srgbClr val="FFFFFF"/>
+          </a:solidFill>
+          <a:ln w="15875">
+            <a:solidFill>
+              <a:srgbClr val="B8C4D0"/>
+            </a:solidFill>
+          </a:ln>
+          <a:effectLst/>
+        </p:spPr>
+        <p:style>
+          <a:lnRef idx="1">
+            <a:schemeClr val="accent1"/>
+          </a:lnRef>
+          <a:fillRef idx="3">
+            <a:schemeClr val="accent1"/>
+          </a:fillRef>
+          <a:effectRef idx="2">
+            <a:schemeClr val="accent1"/>
+          </a:effectRef>
+          <a:fontRef idx="minor">
+            <a:schemeClr val="lt1"/>
+          </a:fontRef>
+        </p:style>
+        <p:txBody>
+          <a:bodyPr rtlCol="0" anchor="t" wrap="square" lIns="320040" tIns="274320" rIns="320040" bIns="274320"/>
+          <a:lstStyle/>
+          <a:p>
+            <a:pPr algn="l"/>
+            <a:r>
+              <a:rPr sz="1300" b="1" i="0">
+                <a:solidFill>
+                  <a:srgbClr val="556575"/>
+                </a:solidFill>
+                <a:latin typeface="Calibri"/>
+              </a:rPr>
+              <a:t>What was said</a:t>
+            </a:r>
+          </a:p>
+          <a:p>
+            <a:pPr algn="l">
+              <a:spcBef>
+                <a:spcPts val="600"/>
+              </a:spcBef>
             </a:pPr>
             <a:r>
-              <a:t>NEUROLENS | SNAPDRAGON AI LAB 2026</a:t>
-            </a:r>
-          </a:p>
-          <a:p>
-            <a:pPr>
-              <a:defRPr sz="2800" b="1">
-                <a:solidFill>
-                  <a:srgbClr val="101828"/>
-                </a:solidFill>
-              </a:defRPr>
+              <a:rPr sz="2000" b="0" i="1">
+                <a:solidFill>
+                  <a:srgbClr val="1B2A3A"/>
+                </a:solidFill>
+                <a:latin typeface="Cambria"/>
+              </a:rPr>
+              <a:t>“It would probably be good if you could get the analysis over to me sometime before Friday.”</a:t>
+            </a:r>
+          </a:p>
+          <a:p>
+            <a:pPr algn="l">
+              <a:spcBef>
+                <a:spcPts val="600"/>
+              </a:spcBef>
             </a:pPr>
             <a:r>
-              <a:t>Human Communication Is Fast. Understanding It Isn't Always.</a:t>
-            </a:r>
-          </a:p>
-        </p:txBody>
-      </p:sp>
-      <p:sp>
-        <p:nvSpPr>
-          <p:cNvPr id="3" name="TextBox 2"/>
+              <a:rPr sz="800" b="0" i="0">
+                <a:solidFill>
+                  <a:srgbClr val="1B2A3A"/>
+                </a:solidFill>
+                <a:latin typeface="Calibri"/>
+              </a:rPr>
+              <a:t/>
+            </a:r>
+          </a:p>
+          <a:p>
+            <a:pPr algn="l">
+              <a:spcBef>
+                <a:spcPts val="600"/>
+              </a:spcBef>
+            </a:pPr>
+            <a:r>
+              <a:rPr sz="1300" b="1" i="0">
+                <a:solidFill>
+                  <a:srgbClr val="556575"/>
+                </a:solidFill>
+                <a:latin typeface="Calibri"/>
+              </a:rPr>
+              <a:t>What a person has to work out, live</a:t>
+            </a:r>
+          </a:p>
+          <a:p>
+            <a:pPr algn="l">
+              <a:spcBef>
+                <a:spcPts val="600"/>
+              </a:spcBef>
+            </a:pPr>
+            <a:r>
+              <a:rPr sz="1700" b="0" i="0">
+                <a:solidFill>
+                  <a:srgbClr val="1B2A3A"/>
+                </a:solidFill>
+                <a:latin typeface="Calibri"/>
+              </a:rPr>
+              <a:t>Is this a request or a suggestion?</a:t>
+            </a:r>
+          </a:p>
+          <a:p>
+            <a:pPr algn="l">
+              <a:spcBef>
+                <a:spcPts val="600"/>
+              </a:spcBef>
+            </a:pPr>
+            <a:r>
+              <a:rPr sz="1700" b="0" i="0">
+                <a:solidFill>
+                  <a:srgbClr val="1B2A3A"/>
+                </a:solidFill>
+                <a:latin typeface="Calibri"/>
+              </a:rPr>
+              <a:t>What is the deadline, exactly?</a:t>
+            </a:r>
+          </a:p>
+          <a:p>
+            <a:pPr algn="l">
+              <a:spcBef>
+                <a:spcPts val="600"/>
+              </a:spcBef>
+            </a:pPr>
+            <a:r>
+              <a:rPr sz="1700" b="0" i="0">
+                <a:solidFill>
+                  <a:srgbClr val="1B2A3A"/>
+                </a:solidFill>
+                <a:latin typeface="Calibri"/>
+              </a:rPr>
+              <a:t>What else is unclear?</a:t>
+            </a:r>
+          </a:p>
+        </p:txBody>
+      </p:sp>
+      <p:sp>
+        <p:nvSpPr>
+          <p:cNvPr id="4" name="Oval 3"/>
+          <p:cNvSpPr/>
+          <p:nvPr/>
+        </p:nvSpPr>
+        <p:spPr>
+          <a:xfrm>
+            <a:off x="6583680" y="1828800"/>
+            <a:ext cx="548640" cy="548640"/>
+          </a:xfrm>
+          <a:prstGeom prst="ellipse">
+            <a:avLst/>
+          </a:prstGeom>
+          <a:solidFill>
+            <a:srgbClr val="0E8F83"/>
+          </a:solidFill>
+          <a:ln>
+            <a:noFill/>
+          </a:ln>
+          <a:effectLst/>
+        </p:spPr>
+        <p:style>
+          <a:lnRef idx="1">
+            <a:schemeClr val="accent1"/>
+          </a:lnRef>
+          <a:fillRef idx="3">
+            <a:schemeClr val="accent1"/>
+          </a:fillRef>
+          <a:effectRef idx="2">
+            <a:schemeClr val="accent1"/>
+          </a:effectRef>
+          <a:fontRef idx="minor">
+            <a:schemeClr val="lt1"/>
+          </a:fontRef>
+        </p:style>
+        <p:txBody>
+          <a:bodyPr rtlCol="0" anchor="ctr" wrap="square" lIns="0" tIns="0" rIns="0" bIns="0"/>
+          <a:lstStyle/>
+          <a:p>
+            <a:pPr algn="ctr"/>
+            <a:r>
+              <a:rPr sz="1600" b="1" i="0">
+                <a:solidFill>
+                  <a:srgbClr val="FFFFFF"/>
+                </a:solidFill>
+                <a:latin typeface="Calibri"/>
+              </a:rPr>
+              <a:t>1</a:t>
+            </a:r>
+          </a:p>
+        </p:txBody>
+      </p:sp>
+      <p:sp>
+        <p:nvSpPr>
+          <p:cNvPr id="5" name="TextBox 4"/>
           <p:cNvSpPr txBox="1"/>
           <p:nvPr/>
         </p:nvSpPr>
         <p:spPr>
           <a:xfrm>
-            <a:off x="731520" y="1828800"/>
-            <a:ext cx="10698480" cy="4389120"/>
+            <a:off x="7360920" y="1737360"/>
+            <a:ext cx="4206240" cy="1280160"/>
           </a:xfrm>
           <a:prstGeom prst="rect">
             <a:avLst/>
@@ -3420,101 +3947,244 @@
           <a:noFill/>
         </p:spPr>
         <p:txBody>
-          <a:bodyPr wrap="square">
+          <a:bodyPr wrap="square" anchor="t" lIns="0" tIns="0" rIns="0" bIns="0">
             <a:spAutoFit/>
           </a:bodyPr>
           <a:lstStyle/>
-          <a:p/>
-          <a:p>
-            <a:pPr>
+          <a:p>
+            <a:pPr algn="l"/>
+            <a:r>
+              <a:rPr sz="2000" b="1" i="0">
+                <a:solidFill>
+                  <a:srgbClr val="0B1F33"/>
+                </a:solidFill>
+                <a:latin typeface="Calibri"/>
+              </a:rPr>
+              <a:t>Indirect wording</a:t>
+            </a:r>
+          </a:p>
+          <a:p>
+            <a:pPr algn="l">
               <a:spcBef>
-                <a:spcPts val="1200"/>
+                <a:spcPts val="600"/>
               </a:spcBef>
-              <a:defRPr b="1" sz="1600">
-                <a:solidFill>
-                  <a:srgbClr val="101828"/>
-                </a:solidFill>
-              </a:defRPr>
             </a:pPr>
             <a:r>
-              <a:t>• Cognitive Friction in Daily Conversations: </a:t>
-            </a:r>
-            <a:r>
-              <a:rPr b="0">
-                <a:solidFill>
-                  <a:srgbClr val="475467"/>
-                </a:solidFill>
-              </a:rPr>
-              <a:t>Subtle, indirect speech like 'It would probably be good if you revisited...' creates severe executive load for neurodivergent minds (ADHD, social processing challenges) and overwhelmed students.</a:t>
-            </a:r>
-          </a:p>
-          <a:p>
-            <a:pPr>
+              <a:rPr sz="1500" b="0" i="0">
+                <a:solidFill>
+                  <a:srgbClr val="556575"/>
+                </a:solidFill>
+                <a:latin typeface="Calibri"/>
+              </a:rPr>
+              <a:t>Polite phrasing can hide real requests and deadlines.</a:t>
+            </a:r>
+          </a:p>
+        </p:txBody>
+      </p:sp>
+      <p:sp>
+        <p:nvSpPr>
+          <p:cNvPr id="6" name="Oval 5"/>
+          <p:cNvSpPr/>
+          <p:nvPr/>
+        </p:nvSpPr>
+        <p:spPr>
+          <a:xfrm>
+            <a:off x="6583680" y="3291840"/>
+            <a:ext cx="548640" cy="548640"/>
+          </a:xfrm>
+          <a:prstGeom prst="ellipse">
+            <a:avLst/>
+          </a:prstGeom>
+          <a:solidFill>
+            <a:srgbClr val="0E8F83"/>
+          </a:solidFill>
+          <a:ln>
+            <a:noFill/>
+          </a:ln>
+          <a:effectLst/>
+        </p:spPr>
+        <p:style>
+          <a:lnRef idx="1">
+            <a:schemeClr val="accent1"/>
+          </a:lnRef>
+          <a:fillRef idx="3">
+            <a:schemeClr val="accent1"/>
+          </a:fillRef>
+          <a:effectRef idx="2">
+            <a:schemeClr val="accent1"/>
+          </a:effectRef>
+          <a:fontRef idx="minor">
+            <a:schemeClr val="lt1"/>
+          </a:fontRef>
+        </p:style>
+        <p:txBody>
+          <a:bodyPr rtlCol="0" anchor="ctr" wrap="square" lIns="0" tIns="0" rIns="0" bIns="0"/>
+          <a:lstStyle/>
+          <a:p>
+            <a:pPr algn="ctr"/>
+            <a:r>
+              <a:rPr sz="1600" b="1" i="0">
+                <a:solidFill>
+                  <a:srgbClr val="FFFFFF"/>
+                </a:solidFill>
+                <a:latin typeface="Calibri"/>
+              </a:rPr>
+              <a:t>2</a:t>
+            </a:r>
+          </a:p>
+        </p:txBody>
+      </p:sp>
+      <p:sp>
+        <p:nvSpPr>
+          <p:cNvPr id="7" name="TextBox 6"/>
+          <p:cNvSpPr txBox="1"/>
+          <p:nvPr/>
+        </p:nvSpPr>
+        <p:spPr>
+          <a:xfrm>
+            <a:off x="7360920" y="3200400"/>
+            <a:ext cx="4206240" cy="1280160"/>
+          </a:xfrm>
+          <a:prstGeom prst="rect">
+            <a:avLst/>
+          </a:prstGeom>
+          <a:noFill/>
+        </p:spPr>
+        <p:txBody>
+          <a:bodyPr wrap="square" anchor="t" lIns="0" tIns="0" rIns="0" bIns="0">
+            <a:spAutoFit/>
+          </a:bodyPr>
+          <a:lstStyle/>
+          <a:p>
+            <a:pPr algn="l"/>
+            <a:r>
+              <a:rPr sz="2000" b="1" i="0">
+                <a:solidFill>
+                  <a:srgbClr val="0B1F33"/>
+                </a:solidFill>
+                <a:latin typeface="Calibri"/>
+              </a:rPr>
+              <a:t>No time to parse</a:t>
+            </a:r>
+          </a:p>
+          <a:p>
+            <a:pPr algn="l">
               <a:spcBef>
-                <a:spcPts val="1200"/>
+                <a:spcPts val="600"/>
               </a:spcBef>
-              <a:defRPr b="1" sz="1600">
-                <a:solidFill>
-                  <a:srgbClr val="101828"/>
-                </a:solidFill>
-              </a:defRPr>
             </a:pPr>
             <a:r>
-              <a:t>• The Implicit-to-Action Gap: </a:t>
-            </a:r>
-            <a:r>
-              <a:rPr b="0">
-                <a:solidFill>
-                  <a:srgbClr val="475467"/>
-                </a:solidFill>
-              </a:rPr>
-              <a:t>Unstructured communication rarely delivers cleanly packaged task lists. Users spend massive mental energy disambiguating what is a real task vs. casual discussion.</a:t>
-            </a:r>
-          </a:p>
-          <a:p>
-            <a:pPr>
+              <a:rPr sz="1500" b="0" i="0">
+                <a:solidFill>
+                  <a:srgbClr val="556575"/>
+                </a:solidFill>
+                <a:latin typeface="Calibri"/>
+              </a:rPr>
+              <a:t>Lectures and meetings move on before you have worked it out.</a:t>
+            </a:r>
+          </a:p>
+        </p:txBody>
+      </p:sp>
+      <p:sp>
+        <p:nvSpPr>
+          <p:cNvPr id="8" name="Oval 7"/>
+          <p:cNvSpPr/>
+          <p:nvPr/>
+        </p:nvSpPr>
+        <p:spPr>
+          <a:xfrm>
+            <a:off x="6583680" y="4754879"/>
+            <a:ext cx="548640" cy="548640"/>
+          </a:xfrm>
+          <a:prstGeom prst="ellipse">
+            <a:avLst/>
+          </a:prstGeom>
+          <a:solidFill>
+            <a:srgbClr val="0E8F83"/>
+          </a:solidFill>
+          <a:ln>
+            <a:noFill/>
+          </a:ln>
+          <a:effectLst/>
+        </p:spPr>
+        <p:style>
+          <a:lnRef idx="1">
+            <a:schemeClr val="accent1"/>
+          </a:lnRef>
+          <a:fillRef idx="3">
+            <a:schemeClr val="accent1"/>
+          </a:fillRef>
+          <a:effectRef idx="2">
+            <a:schemeClr val="accent1"/>
+          </a:effectRef>
+          <a:fontRef idx="minor">
+            <a:schemeClr val="lt1"/>
+          </a:fontRef>
+        </p:style>
+        <p:txBody>
+          <a:bodyPr rtlCol="0" anchor="ctr" wrap="square" lIns="0" tIns="0" rIns="0" bIns="0"/>
+          <a:lstStyle/>
+          <a:p>
+            <a:pPr algn="ctr"/>
+            <a:r>
+              <a:rPr sz="1600" b="1" i="0">
+                <a:solidFill>
+                  <a:srgbClr val="FFFFFF"/>
+                </a:solidFill>
+                <a:latin typeface="Calibri"/>
+              </a:rPr>
+              <a:t>3</a:t>
+            </a:r>
+          </a:p>
+        </p:txBody>
+      </p:sp>
+      <p:sp>
+        <p:nvSpPr>
+          <p:cNvPr id="9" name="TextBox 8"/>
+          <p:cNvSpPr txBox="1"/>
+          <p:nvPr/>
+        </p:nvSpPr>
+        <p:spPr>
+          <a:xfrm>
+            <a:off x="7360920" y="4663440"/>
+            <a:ext cx="4206240" cy="1280160"/>
+          </a:xfrm>
+          <a:prstGeom prst="rect">
+            <a:avLst/>
+          </a:prstGeom>
+          <a:noFill/>
+        </p:spPr>
+        <p:txBody>
+          <a:bodyPr wrap="square" anchor="t" lIns="0" tIns="0" rIns="0" bIns="0">
+            <a:spAutoFit/>
+          </a:bodyPr>
+          <a:lstStyle/>
+          <a:p>
+            <a:pPr algn="l"/>
+            <a:r>
+              <a:rPr sz="2000" b="1" i="0">
+                <a:solidFill>
+                  <a:srgbClr val="0B1F33"/>
+                </a:solidFill>
+                <a:latin typeface="Calibri"/>
+              </a:rPr>
+              <a:t>Cloud help costs privacy</a:t>
+            </a:r>
+          </a:p>
+          <a:p>
+            <a:pPr algn="l">
               <a:spcBef>
-                <a:spcPts val="1200"/>
+                <a:spcPts val="600"/>
               </a:spcBef>
-              <a:defRPr b="1" sz="1600">
-                <a:solidFill>
-                  <a:srgbClr val="101828"/>
-                </a:solidFill>
-              </a:defRPr>
             </a:pPr>
             <a:r>
-              <a:t>• The Cloud Privacy Dilemma: </a:t>
-            </a:r>
-            <a:r>
-              <a:rPr b="0">
-                <a:solidFill>
-                  <a:srgbClr val="475467"/>
-                </a:solidFill>
-              </a:rPr>
-              <a:t>Sending daily conversations, lectures, and screen context to cloud LLMs creates unacceptable privacy, data governance, and compliance risks.</a:t>
-            </a:r>
-          </a:p>
-          <a:p>
-            <a:pPr>
-              <a:spcBef>
-                <a:spcPts val="1200"/>
-              </a:spcBef>
-              <a:defRPr b="1" sz="1600">
-                <a:solidFill>
-                  <a:srgbClr val="101828"/>
-                </a:solidFill>
-              </a:defRPr>
-            </a:pPr>
-            <a:r>
-              <a:t>• The Need for On-Device Translation: </a:t>
-            </a:r>
-            <a:r>
-              <a:rPr b="0">
-                <a:solidFill>
-                  <a:srgbClr val="475467"/>
-                </a:solidFill>
-              </a:rPr>
-              <a:t>A private cognitive layer sitting between messy spoken/visual information and the user's brain—running 100% locally on the device.</a:t>
+              <a:rPr sz="1500" b="0" i="0">
+                <a:solidFill>
+                  <a:srgbClr val="556575"/>
+                </a:solidFill>
+                <a:latin typeface="Calibri"/>
+              </a:rPr>
+              <a:t>Assistants that fix this usually need your conversations sent to a remote server.</a:t>
             </a:r>
           </a:p>
         </p:txBody>
@@ -3533,7 +4203,7 @@
     <p:bg>
       <p:bgPr>
         <a:solidFill>
-          <a:srgbClr val="F8FAFC"/>
+          <a:srgbClr val="F5F7FA"/>
         </a:solidFill>
         <a:effectLst/>
       </p:bgPr>
@@ -3553,8 +4223,8 @@
         </p:nvSpPr>
         <p:spPr>
           <a:xfrm>
-            <a:off x="731520" y="457200"/>
-            <a:ext cx="10698480" cy="1097280"/>
+            <a:off x="640080" y="457200"/>
+            <a:ext cx="10881360" cy="822960"/>
           </a:xfrm>
           <a:prstGeom prst="rect">
             <a:avLst/>
@@ -3562,148 +4232,568 @@
           <a:noFill/>
         </p:spPr>
         <p:txBody>
-          <a:bodyPr wrap="square" lIns="0" tIns="0" rIns="0" bIns="0">
+          <a:bodyPr wrap="square" anchor="ctr" lIns="0" tIns="0" rIns="0" bIns="0">
             <a:spAutoFit/>
           </a:bodyPr>
           <a:lstStyle/>
           <a:p>
-            <a:pPr>
-              <a:defRPr sz="1100" b="1">
-                <a:solidFill>
-                  <a:srgbClr val="E02020"/>
-                </a:solidFill>
-              </a:defRPr>
+            <a:pPr algn="l"/>
+            <a:r>
+              <a:rPr sz="3400" b="1" i="0">
+                <a:solidFill>
+                  <a:srgbClr val="0B1F33"/>
+                </a:solidFill>
+                <a:latin typeface="Cambria"/>
+              </a:rPr>
+              <a:t>What is missing today</a:t>
+            </a:r>
+          </a:p>
+        </p:txBody>
+      </p:sp>
+      <p:sp>
+        <p:nvSpPr>
+          <p:cNvPr id="3" name="Rounded Rectangle 2"/>
+          <p:cNvSpPr/>
+          <p:nvPr/>
+        </p:nvSpPr>
+        <p:spPr>
+          <a:xfrm>
+            <a:off x="640080" y="1737360"/>
+            <a:ext cx="2606040" cy="3200400"/>
+          </a:xfrm>
+          <a:prstGeom prst="roundRect">
+            <a:avLst>
+              <a:gd name="adj" fmla="val 6000"/>
+            </a:avLst>
+          </a:prstGeom>
+          <a:solidFill>
+            <a:srgbClr val="FFFFFF"/>
+          </a:solidFill>
+          <a:ln w="15875">
+            <a:solidFill>
+              <a:srgbClr val="B8C4D0"/>
+            </a:solidFill>
+          </a:ln>
+          <a:effectLst/>
+        </p:spPr>
+        <p:style>
+          <a:lnRef idx="1">
+            <a:schemeClr val="accent1"/>
+          </a:lnRef>
+          <a:fillRef idx="3">
+            <a:schemeClr val="accent1"/>
+          </a:fillRef>
+          <a:effectRef idx="2">
+            <a:schemeClr val="accent1"/>
+          </a:effectRef>
+          <a:fontRef idx="minor">
+            <a:schemeClr val="lt1"/>
+          </a:fontRef>
+        </p:style>
+        <p:txBody>
+          <a:bodyPr rtlCol="0" anchor="t" wrap="square" lIns="228600" tIns="274320" rIns="228600" bIns="228600"/>
+          <a:lstStyle/>
+          <a:p>
+            <a:pPr algn="l"/>
+            <a:r>
+              <a:rPr sz="1900" b="1" i="0">
+                <a:solidFill>
+                  <a:srgbClr val="0B1F33"/>
+                </a:solidFill>
+                <a:latin typeface="Cambria"/>
+              </a:rPr>
+              <a:t>Transcription only</a:t>
+            </a:r>
+          </a:p>
+          <a:p>
+            <a:pPr algn="l">
+              <a:spcBef>
+                <a:spcPts val="600"/>
+              </a:spcBef>
             </a:pPr>
             <a:r>
-              <a:t>NEUROLENS | SNAPDRAGON AI LAB 2026</a:t>
-            </a:r>
-          </a:p>
-          <a:p>
-            <a:pPr>
-              <a:defRPr sz="2800" b="1">
-                <a:solidFill>
-                  <a:srgbClr val="101828"/>
-                </a:solidFill>
-              </a:defRPr>
+              <a:rPr sz="600" b="0" i="0">
+                <a:solidFill>
+                  <a:srgbClr val="1B2A3A"/>
+                </a:solidFill>
+                <a:latin typeface="Calibri"/>
+              </a:rPr>
+              <a:t/>
+            </a:r>
+          </a:p>
+          <a:p>
+            <a:pPr algn="l">
+              <a:spcBef>
+                <a:spcPts val="600"/>
+              </a:spcBef>
             </a:pPr>
             <a:r>
-              <a:t>Why Existing Tools Fall Short</a:t>
-            </a:r>
-          </a:p>
-        </p:txBody>
-      </p:sp>
-      <p:sp>
-        <p:nvSpPr>
-          <p:cNvPr id="3" name="TextBox 2"/>
-          <p:cNvSpPr txBox="1"/>
+              <a:rPr sz="1500" b="0" i="0">
+                <a:solidFill>
+                  <a:srgbClr val="556575"/>
+                </a:solidFill>
+                <a:latin typeface="Calibri"/>
+              </a:rPr>
+              <a:t>Gives you every word.</a:t>
+            </a:r>
+          </a:p>
+          <a:p>
+            <a:pPr algn="l">
+              <a:spcBef>
+                <a:spcPts val="600"/>
+              </a:spcBef>
+            </a:pPr>
+            <a:r>
+              <a:rPr sz="600" b="0" i="0">
+                <a:solidFill>
+                  <a:srgbClr val="1B2A3A"/>
+                </a:solidFill>
+                <a:latin typeface="Calibri"/>
+              </a:rPr>
+              <a:t/>
+            </a:r>
+          </a:p>
+          <a:p>
+            <a:pPr algn="l">
+              <a:spcBef>
+                <a:spcPts val="600"/>
+              </a:spcBef>
+            </a:pPr>
+            <a:r>
+              <a:rPr sz="1200" b="1" i="0">
+                <a:solidFill>
+                  <a:srgbClr val="C04B3B"/>
+                </a:solidFill>
+                <a:latin typeface="Calibri"/>
+              </a:rPr>
+              <a:t>Gap</a:t>
+            </a:r>
+          </a:p>
+          <a:p>
+            <a:pPr algn="l">
+              <a:spcBef>
+                <a:spcPts val="600"/>
+              </a:spcBef>
+            </a:pPr>
+            <a:r>
+              <a:rPr sz="1600" b="0" i="0">
+                <a:solidFill>
+                  <a:srgbClr val="1B2A3A"/>
+                </a:solidFill>
+                <a:latin typeface="Calibri"/>
+              </a:rPr>
+              <a:t>Does not say what matters or what to do.</a:t>
+            </a:r>
+          </a:p>
+        </p:txBody>
+      </p:sp>
+      <p:sp>
+        <p:nvSpPr>
+          <p:cNvPr id="4" name="Rounded Rectangle 3"/>
+          <p:cNvSpPr/>
           <p:nvPr/>
         </p:nvSpPr>
         <p:spPr>
           <a:xfrm>
-            <a:off x="731520" y="1828800"/>
-            <a:ext cx="10698480" cy="4389120"/>
-          </a:xfrm>
-          <a:prstGeom prst="rect">
-            <a:avLst/>
+            <a:off x="3429000" y="1737360"/>
+            <a:ext cx="2606040" cy="3200400"/>
+          </a:xfrm>
+          <a:prstGeom prst="roundRect">
+            <a:avLst>
+              <a:gd name="adj" fmla="val 6000"/>
+            </a:avLst>
           </a:prstGeom>
-          <a:noFill/>
-        </p:spPr>
-        <p:txBody>
-          <a:bodyPr wrap="square">
-            <a:spAutoFit/>
-          </a:bodyPr>
-          <a:lstStyle/>
-          <a:p/>
-          <a:p>
-            <a:pPr>
+          <a:solidFill>
+            <a:srgbClr val="FFFFFF"/>
+          </a:solidFill>
+          <a:ln w="15875">
+            <a:solidFill>
+              <a:srgbClr val="B8C4D0"/>
+            </a:solidFill>
+          </a:ln>
+          <a:effectLst/>
+        </p:spPr>
+        <p:style>
+          <a:lnRef idx="1">
+            <a:schemeClr val="accent1"/>
+          </a:lnRef>
+          <a:fillRef idx="3">
+            <a:schemeClr val="accent1"/>
+          </a:fillRef>
+          <a:effectRef idx="2">
+            <a:schemeClr val="accent1"/>
+          </a:effectRef>
+          <a:fontRef idx="minor">
+            <a:schemeClr val="lt1"/>
+          </a:fontRef>
+        </p:style>
+        <p:txBody>
+          <a:bodyPr rtlCol="0" anchor="t" wrap="square" lIns="228600" tIns="274320" rIns="228600" bIns="228600"/>
+          <a:lstStyle/>
+          <a:p>
+            <a:pPr algn="l"/>
+            <a:r>
+              <a:rPr sz="1900" b="1" i="0">
+                <a:solidFill>
+                  <a:srgbClr val="0B1F33"/>
+                </a:solidFill>
+                <a:latin typeface="Cambria"/>
+              </a:rPr>
+              <a:t>Cloud AI assistants</a:t>
+            </a:r>
+          </a:p>
+          <a:p>
+            <a:pPr algn="l">
               <a:spcBef>
-                <a:spcPts val="1200"/>
+                <a:spcPts val="600"/>
               </a:spcBef>
-              <a:defRPr b="1" sz="1600">
-                <a:solidFill>
-                  <a:srgbClr val="101828"/>
-                </a:solidFill>
-              </a:defRPr>
             </a:pPr>
             <a:r>
-              <a:t>✖ Generic Transcription (Whisper APIs): </a:t>
-            </a:r>
-            <a:r>
-              <a:rPr b="0">
-                <a:solidFill>
-                  <a:srgbClr val="475467"/>
-                </a:solidFill>
-              </a:rPr>
-              <a:t>Dumps thousands of raw words without understanding. Increases cognitive load instead of reducing it.</a:t>
-            </a:r>
-          </a:p>
-          <a:p>
-            <a:pPr>
+              <a:rPr sz="600" b="0" i="0">
+                <a:solidFill>
+                  <a:srgbClr val="1B2A3A"/>
+                </a:solidFill>
+                <a:latin typeface="Calibri"/>
+              </a:rPr>
+              <a:t/>
+            </a:r>
+          </a:p>
+          <a:p>
+            <a:pPr algn="l">
               <a:spcBef>
-                <a:spcPts val="1200"/>
+                <a:spcPts val="600"/>
               </a:spcBef>
-              <a:defRPr b="1" sz="1600">
-                <a:solidFill>
-                  <a:srgbClr val="101828"/>
-                </a:solidFill>
-              </a:defRPr>
             </a:pPr>
             <a:r>
-              <a:t>✖ Cloud AI Chatbots (ChatGPT / Cloud Claude): </a:t>
-            </a:r>
-            <a:r>
-              <a:rPr b="0">
-                <a:solidFill>
-                  <a:srgbClr val="475467"/>
-                </a:solidFill>
-              </a:rPr>
-              <a:t>Leaks sensitive personal thoughts and workplace meetings to remote cloud infrastructure with recurring latency.</a:t>
-            </a:r>
-          </a:p>
-          <a:p>
-            <a:pPr>
+              <a:rPr sz="1500" b="0" i="0">
+                <a:solidFill>
+                  <a:srgbClr val="556575"/>
+                </a:solidFill>
+                <a:latin typeface="Calibri"/>
+              </a:rPr>
+              <a:t>Can summarize and answer.</a:t>
+            </a:r>
+          </a:p>
+          <a:p>
+            <a:pPr algn="l">
               <a:spcBef>
-                <a:spcPts val="1200"/>
+                <a:spcPts val="600"/>
               </a:spcBef>
-              <a:defRPr b="1" sz="1600">
-                <a:solidFill>
-                  <a:srgbClr val="101828"/>
-                </a:solidFill>
-              </a:defRPr>
             </a:pPr>
             <a:r>
-              <a:t>✖ Productivity Apps (Todoist / Notion): </a:t>
-            </a:r>
-            <a:r>
-              <a:rPr b="0">
-                <a:solidFill>
-                  <a:srgbClr val="475467"/>
-                </a:solidFill>
-              </a:rPr>
-              <a:t>Requires manual typing and tedious task breakdown. Fails to capture live verbal context at the moment of utterance.</a:t>
-            </a:r>
-          </a:p>
-          <a:p>
-            <a:pPr>
+              <a:rPr sz="600" b="0" i="0">
+                <a:solidFill>
+                  <a:srgbClr val="1B2A3A"/>
+                </a:solidFill>
+                <a:latin typeface="Calibri"/>
+              </a:rPr>
+              <a:t/>
+            </a:r>
+          </a:p>
+          <a:p>
+            <a:pPr algn="l">
               <a:spcBef>
-                <a:spcPts val="1200"/>
+                <a:spcPts val="600"/>
               </a:spcBef>
-              <a:defRPr b="1" sz="1600">
-                <a:solidFill>
-                  <a:srgbClr val="101828"/>
-                </a:solidFill>
-              </a:defRPr>
             </a:pPr>
             <a:r>
-              <a:t>✖ Hallucinatory AI Assistants: </a:t>
-            </a:r>
-            <a:r>
-              <a:rPr b="0">
-                <a:solidFill>
-                  <a:srgbClr val="475467"/>
-                </a:solidFill>
-              </a:rPr>
-              <a:t>Asserts false certainty about ambiguous intent instead of clearly stating what is unknown or asking for clarification.</a:t>
+              <a:rPr sz="1200" b="1" i="0">
+                <a:solidFill>
+                  <a:srgbClr val="C04B3B"/>
+                </a:solidFill>
+                <a:latin typeface="Calibri"/>
+              </a:rPr>
+              <a:t>Gap</a:t>
+            </a:r>
+          </a:p>
+          <a:p>
+            <a:pPr algn="l">
+              <a:spcBef>
+                <a:spcPts val="600"/>
+              </a:spcBef>
+            </a:pPr>
+            <a:r>
+              <a:rPr sz="1600" b="0" i="0">
+                <a:solidFill>
+                  <a:srgbClr val="1B2A3A"/>
+                </a:solidFill>
+                <a:latin typeface="Calibri"/>
+              </a:rPr>
+              <a:t>Needs private conversations sent off-device.</a:t>
+            </a:r>
+          </a:p>
+        </p:txBody>
+      </p:sp>
+      <p:sp>
+        <p:nvSpPr>
+          <p:cNvPr id="5" name="Rounded Rectangle 4"/>
+          <p:cNvSpPr/>
+          <p:nvPr/>
+        </p:nvSpPr>
+        <p:spPr>
+          <a:xfrm>
+            <a:off x="6217920" y="1737360"/>
+            <a:ext cx="2606040" cy="3200400"/>
+          </a:xfrm>
+          <a:prstGeom prst="roundRect">
+            <a:avLst>
+              <a:gd name="adj" fmla="val 6000"/>
+            </a:avLst>
+          </a:prstGeom>
+          <a:solidFill>
+            <a:srgbClr val="FFFFFF"/>
+          </a:solidFill>
+          <a:ln w="15875">
+            <a:solidFill>
+              <a:srgbClr val="B8C4D0"/>
+            </a:solidFill>
+          </a:ln>
+          <a:effectLst/>
+        </p:spPr>
+        <p:style>
+          <a:lnRef idx="1">
+            <a:schemeClr val="accent1"/>
+          </a:lnRef>
+          <a:fillRef idx="3">
+            <a:schemeClr val="accent1"/>
+          </a:fillRef>
+          <a:effectRef idx="2">
+            <a:schemeClr val="accent1"/>
+          </a:effectRef>
+          <a:fontRef idx="minor">
+            <a:schemeClr val="lt1"/>
+          </a:fontRef>
+        </p:style>
+        <p:txBody>
+          <a:bodyPr rtlCol="0" anchor="t" wrap="square" lIns="228600" tIns="274320" rIns="228600" bIns="228600"/>
+          <a:lstStyle/>
+          <a:p>
+            <a:pPr algn="l"/>
+            <a:r>
+              <a:rPr sz="1900" b="1" i="0">
+                <a:solidFill>
+                  <a:srgbClr val="0B1F33"/>
+                </a:solidFill>
+                <a:latin typeface="Cambria"/>
+              </a:rPr>
+              <a:t>Task apps</a:t>
+            </a:r>
+          </a:p>
+          <a:p>
+            <a:pPr algn="l">
+              <a:spcBef>
+                <a:spcPts val="600"/>
+              </a:spcBef>
+            </a:pPr>
+            <a:r>
+              <a:rPr sz="600" b="0" i="0">
+                <a:solidFill>
+                  <a:srgbClr val="1B2A3A"/>
+                </a:solidFill>
+                <a:latin typeface="Calibri"/>
+              </a:rPr>
+              <a:t/>
+            </a:r>
+          </a:p>
+          <a:p>
+            <a:pPr algn="l">
+              <a:spcBef>
+                <a:spcPts val="600"/>
+              </a:spcBef>
+            </a:pPr>
+            <a:r>
+              <a:rPr sz="1500" b="0" i="0">
+                <a:solidFill>
+                  <a:srgbClr val="556575"/>
+                </a:solidFill>
+                <a:latin typeface="Calibri"/>
+              </a:rPr>
+              <a:t>Organize tasks well.</a:t>
+            </a:r>
+          </a:p>
+          <a:p>
+            <a:pPr algn="l">
+              <a:spcBef>
+                <a:spcPts val="600"/>
+              </a:spcBef>
+            </a:pPr>
+            <a:r>
+              <a:rPr sz="600" b="0" i="0">
+                <a:solidFill>
+                  <a:srgbClr val="1B2A3A"/>
+                </a:solidFill>
+                <a:latin typeface="Calibri"/>
+              </a:rPr>
+              <a:t/>
+            </a:r>
+          </a:p>
+          <a:p>
+            <a:pPr algn="l">
+              <a:spcBef>
+                <a:spcPts val="600"/>
+              </a:spcBef>
+            </a:pPr>
+            <a:r>
+              <a:rPr sz="1200" b="1" i="0">
+                <a:solidFill>
+                  <a:srgbClr val="C04B3B"/>
+                </a:solidFill>
+                <a:latin typeface="Calibri"/>
+              </a:rPr>
+              <a:t>Gap</a:t>
+            </a:r>
+          </a:p>
+          <a:p>
+            <a:pPr algn="l">
+              <a:spcBef>
+                <a:spcPts val="600"/>
+              </a:spcBef>
+            </a:pPr>
+            <a:r>
+              <a:rPr sz="1600" b="0" i="0">
+                <a:solidFill>
+                  <a:srgbClr val="1B2A3A"/>
+                </a:solidFill>
+                <a:latin typeface="Calibri"/>
+              </a:rPr>
+              <a:t>Start from tasks you type in yourself.</a:t>
+            </a:r>
+          </a:p>
+        </p:txBody>
+      </p:sp>
+      <p:sp>
+        <p:nvSpPr>
+          <p:cNvPr id="6" name="Rounded Rectangle 5"/>
+          <p:cNvSpPr/>
+          <p:nvPr/>
+        </p:nvSpPr>
+        <p:spPr>
+          <a:xfrm>
+            <a:off x="9006840" y="1737360"/>
+            <a:ext cx="2606040" cy="3200400"/>
+          </a:xfrm>
+          <a:prstGeom prst="roundRect">
+            <a:avLst>
+              <a:gd name="adj" fmla="val 6000"/>
+            </a:avLst>
+          </a:prstGeom>
+          <a:solidFill>
+            <a:srgbClr val="FFFFFF"/>
+          </a:solidFill>
+          <a:ln w="15875">
+            <a:solidFill>
+              <a:srgbClr val="B8C4D0"/>
+            </a:solidFill>
+          </a:ln>
+          <a:effectLst/>
+        </p:spPr>
+        <p:style>
+          <a:lnRef idx="1">
+            <a:schemeClr val="accent1"/>
+          </a:lnRef>
+          <a:fillRef idx="3">
+            <a:schemeClr val="accent1"/>
+          </a:fillRef>
+          <a:effectRef idx="2">
+            <a:schemeClr val="accent1"/>
+          </a:effectRef>
+          <a:fontRef idx="minor">
+            <a:schemeClr val="lt1"/>
+          </a:fontRef>
+        </p:style>
+        <p:txBody>
+          <a:bodyPr rtlCol="0" anchor="t" wrap="square" lIns="228600" tIns="274320" rIns="228600" bIns="228600"/>
+          <a:lstStyle/>
+          <a:p>
+            <a:pPr algn="l"/>
+            <a:r>
+              <a:rPr sz="1900" b="1" i="0">
+                <a:solidFill>
+                  <a:srgbClr val="0B1F33"/>
+                </a:solidFill>
+                <a:latin typeface="Cambria"/>
+              </a:rPr>
+              <a:t>Overconfident answers</a:t>
+            </a:r>
+          </a:p>
+          <a:p>
+            <a:pPr algn="l">
+              <a:spcBef>
+                <a:spcPts val="600"/>
+              </a:spcBef>
+            </a:pPr>
+            <a:r>
+              <a:rPr sz="600" b="0" i="0">
+                <a:solidFill>
+                  <a:srgbClr val="1B2A3A"/>
+                </a:solidFill>
+                <a:latin typeface="Calibri"/>
+              </a:rPr>
+              <a:t/>
+            </a:r>
+          </a:p>
+          <a:p>
+            <a:pPr algn="l">
+              <a:spcBef>
+                <a:spcPts val="600"/>
+              </a:spcBef>
+            </a:pPr>
+            <a:r>
+              <a:rPr sz="1500" b="0" i="0">
+                <a:solidFill>
+                  <a:srgbClr val="556575"/>
+                </a:solidFill>
+                <a:latin typeface="Calibri"/>
+              </a:rPr>
+              <a:t>Sound certain.</a:t>
+            </a:r>
+          </a:p>
+          <a:p>
+            <a:pPr algn="l">
+              <a:spcBef>
+                <a:spcPts val="600"/>
+              </a:spcBef>
+            </a:pPr>
+            <a:r>
+              <a:rPr sz="600" b="0" i="0">
+                <a:solidFill>
+                  <a:srgbClr val="1B2A3A"/>
+                </a:solidFill>
+                <a:latin typeface="Calibri"/>
+              </a:rPr>
+              <a:t/>
+            </a:r>
+          </a:p>
+          <a:p>
+            <a:pPr algn="l">
+              <a:spcBef>
+                <a:spcPts val="600"/>
+              </a:spcBef>
+            </a:pPr>
+            <a:r>
+              <a:rPr sz="1200" b="1" i="0">
+                <a:solidFill>
+                  <a:srgbClr val="C04B3B"/>
+                </a:solidFill>
+                <a:latin typeface="Calibri"/>
+              </a:rPr>
+              <a:t>Gap</a:t>
+            </a:r>
+          </a:p>
+          <a:p>
+            <a:pPr algn="l">
+              <a:spcBef>
+                <a:spcPts val="600"/>
+              </a:spcBef>
+            </a:pPr>
+            <a:r>
+              <a:rPr sz="1600" b="0" i="0">
+                <a:solidFill>
+                  <a:srgbClr val="1B2A3A"/>
+                </a:solidFill>
+                <a:latin typeface="Calibri"/>
+              </a:rPr>
+              <a:t>Rarely say what is unclear or ask instead.</a:t>
             </a:r>
           </a:p>
         </p:txBody>
@@ -3722,7 +4812,7 @@
     <p:bg>
       <p:bgPr>
         <a:solidFill>
-          <a:srgbClr val="F8FAFC"/>
+          <a:srgbClr val="F5F7FA"/>
         </a:solidFill>
         <a:effectLst/>
       </p:bgPr>
@@ -3742,8 +4832,8 @@
         </p:nvSpPr>
         <p:spPr>
           <a:xfrm>
-            <a:off x="731520" y="457200"/>
-            <a:ext cx="10698480" cy="1097280"/>
+            <a:off x="640080" y="457200"/>
+            <a:ext cx="10881360" cy="822960"/>
           </a:xfrm>
           <a:prstGeom prst="rect">
             <a:avLst/>
@@ -3751,46 +4841,89 @@
           <a:noFill/>
         </p:spPr>
         <p:txBody>
-          <a:bodyPr wrap="square" lIns="0" tIns="0" rIns="0" bIns="0">
+          <a:bodyPr wrap="square" anchor="ctr" lIns="0" tIns="0" rIns="0" bIns="0">
             <a:spAutoFit/>
           </a:bodyPr>
           <a:lstStyle/>
           <a:p>
-            <a:pPr>
-              <a:defRPr sz="1100" b="1">
-                <a:solidFill>
-                  <a:srgbClr val="E02020"/>
-                </a:solidFill>
-              </a:defRPr>
-            </a:pPr>
-            <a:r>
-              <a:t>NEUROLENS | SNAPDRAGON AI LAB 2026</a:t>
-            </a:r>
-          </a:p>
-          <a:p>
-            <a:pPr>
-              <a:defRPr sz="2800" b="1">
-                <a:solidFill>
-                  <a:srgbClr val="101828"/>
-                </a:solidFill>
-              </a:defRPr>
-            </a:pPr>
-            <a:r>
-              <a:t>The Solution: NeuroLens Cognitive Compiler</a:t>
-            </a:r>
-          </a:p>
-        </p:txBody>
-      </p:sp>
-      <p:sp>
-        <p:nvSpPr>
-          <p:cNvPr id="3" name="TextBox 2"/>
+            <a:pPr algn="l"/>
+            <a:r>
+              <a:rPr sz="3400" b="1" i="0">
+                <a:solidFill>
+                  <a:srgbClr val="0B1F33"/>
+                </a:solidFill>
+                <a:latin typeface="Cambria"/>
+              </a:rPr>
+              <a:t>From messy language to structure</a:t>
+            </a:r>
+          </a:p>
+        </p:txBody>
+      </p:sp>
+      <p:sp>
+        <p:nvSpPr>
+          <p:cNvPr id="3" name="Rounded Rectangle 2"/>
+          <p:cNvSpPr/>
+          <p:nvPr/>
+        </p:nvSpPr>
+        <p:spPr>
+          <a:xfrm>
+            <a:off x="640080" y="1828800"/>
+            <a:ext cx="2468880" cy="822960"/>
+          </a:xfrm>
+          <a:prstGeom prst="roundRect">
+            <a:avLst>
+              <a:gd name="adj" fmla="val 6000"/>
+            </a:avLst>
+          </a:prstGeom>
+          <a:solidFill>
+            <a:srgbClr val="0B1F33"/>
+          </a:solidFill>
+          <a:ln>
+            <a:noFill/>
+          </a:ln>
+          <a:effectLst/>
+        </p:spPr>
+        <p:style>
+          <a:lnRef idx="1">
+            <a:schemeClr val="accent1"/>
+          </a:lnRef>
+          <a:fillRef idx="3">
+            <a:schemeClr val="accent1"/>
+          </a:fillRef>
+          <a:effectRef idx="2">
+            <a:schemeClr val="accent1"/>
+          </a:effectRef>
+          <a:fontRef idx="minor">
+            <a:schemeClr val="lt1"/>
+          </a:fontRef>
+        </p:style>
+        <p:txBody>
+          <a:bodyPr rtlCol="0" anchor="ctr" wrap="square" lIns="137160" tIns="91440" rIns="137160" bIns="91440"/>
+          <a:lstStyle/>
+          <a:p>
+            <a:pPr algn="ctr"/>
+            <a:r>
+              <a:rPr sz="2000" b="1" i="0">
+                <a:solidFill>
+                  <a:srgbClr val="FFFFFF"/>
+                </a:solidFill>
+                <a:latin typeface="Calibri"/>
+              </a:rPr>
+              <a:t>1  Parse</a:t>
+            </a:r>
+          </a:p>
+        </p:txBody>
+      </p:sp>
+      <p:sp>
+        <p:nvSpPr>
+          <p:cNvPr id="4" name="TextBox 3"/>
           <p:cNvSpPr txBox="1"/>
           <p:nvPr/>
         </p:nvSpPr>
         <p:spPr>
           <a:xfrm>
-            <a:off x="731520" y="1828800"/>
-            <a:ext cx="10698480" cy="4389120"/>
+            <a:off x="640080" y="2880360"/>
+            <a:ext cx="2468880" cy="1828800"/>
           </a:xfrm>
           <a:prstGeom prst="rect">
             <a:avLst/>
@@ -3798,112 +4931,462 @@
           <a:noFill/>
         </p:spPr>
         <p:txBody>
-          <a:bodyPr wrap="square">
+          <a:bodyPr wrap="square" anchor="t" lIns="0" tIns="0" rIns="0" bIns="0">
             <a:spAutoFit/>
           </a:bodyPr>
           <a:lstStyle/>
           <a:p>
-            <a:pPr>
-              <a:defRPr sz="1800" b="1">
-                <a:solidFill>
-                  <a:srgbClr val="101828"/>
-                </a:solidFill>
-              </a:defRPr>
-            </a:pPr>
-            <a:r>
-              <a:t>NeuroLens is not a generic chatbot. It is a formal Cognitive Compiler:</a:t>
-            </a:r>
-          </a:p>
-          <a:p>
-            <a:pPr>
-              <a:spcBef>
-                <a:spcPts val="1000"/>
-              </a:spcBef>
-              <a:defRPr b="1" sz="1600">
-                <a:solidFill>
-                  <a:srgbClr val="027AFF"/>
-                </a:solidFill>
-              </a:defRPr>
-            </a:pPr>
-            <a:r>
-              <a:t>► Parse: </a:t>
-            </a:r>
-            <a:r>
-              <a:rPr b="0">
-                <a:solidFill>
-                  <a:srgbClr val="475467"/>
-                </a:solidFill>
-              </a:rPr>
-              <a:t>Captures raw speech chunks via VAD and user-selected visual screen context.</a:t>
-            </a:r>
-          </a:p>
-          <a:p>
-            <a:pPr>
-              <a:spcBef>
-                <a:spcPts val="1000"/>
-              </a:spcBef>
-              <a:defRPr b="1" sz="1600">
-                <a:solidFill>
-                  <a:srgbClr val="027AFF"/>
-                </a:solidFill>
-              </a:defRPr>
-            </a:pPr>
-            <a:r>
-              <a:t>► Disambiguate: </a:t>
-            </a:r>
-            <a:r>
-              <a:rPr b="0">
-                <a:solidFill>
-                  <a:srgbClr val="475467"/>
-                </a:solidFill>
-              </a:rPr>
-              <a:t>Evaluates linguistic ambiguity, extracts deterministic deadlines, and tags uncertainty.</a:t>
-            </a:r>
-          </a:p>
-          <a:p>
-            <a:pPr>
-              <a:spcBef>
-                <a:spcPts val="1000"/>
-              </a:spcBef>
-              <a:defRPr b="1" sz="1600">
-                <a:solidFill>
-                  <a:srgbClr val="027AFF"/>
-                </a:solidFill>
-              </a:defRPr>
-            </a:pPr>
-            <a:r>
-              <a:t>► Structure: </a:t>
-            </a:r>
-            <a:r>
-              <a:rPr b="0">
-                <a:solidFill>
-                  <a:srgbClr val="475467"/>
-                </a:solidFill>
-              </a:rPr>
-              <a:t>Emits verified JSON containing explicit tasks, priority, deadlines, and multi-hypothesis interpretations.</a:t>
-            </a:r>
-          </a:p>
-          <a:p>
-            <a:pPr>
-              <a:spcBef>
-                <a:spcPts val="1000"/>
-              </a:spcBef>
-              <a:defRPr b="1" sz="1600">
-                <a:solidFill>
-                  <a:srgbClr val="027AFF"/>
-                </a:solidFill>
-              </a:defRPr>
-            </a:pPr>
-            <a:r>
-              <a:t>► Present: </a:t>
-            </a:r>
-            <a:r>
-              <a:rPr b="0">
-                <a:solidFill>
-                  <a:srgbClr val="475467"/>
-                </a:solidFill>
-              </a:rPr>
-              <a:t>Adapts information density across Minimal, Balanced, and Detailed cognitive load modes.</a:t>
+            <a:pPr algn="l"/>
+            <a:r>
+              <a:rPr sz="1600" b="0" i="0">
+                <a:solidFill>
+                  <a:srgbClr val="1B2A3A"/>
+                </a:solidFill>
+                <a:latin typeface="Calibri"/>
+              </a:rPr>
+              <a:t>Split speech or text into clauses. Find dates and times with rules.</a:t>
+            </a:r>
+          </a:p>
+        </p:txBody>
+      </p:sp>
+      <p:cxnSp>
+        <p:nvCxnSpPr>
+          <p:cNvPr id="5" name="Connector 4"/>
+          <p:cNvCxnSpPr/>
+          <p:nvPr/>
+        </p:nvCxnSpPr>
+        <p:spPr>
+          <a:xfrm>
+            <a:off x="3154680" y="2240280"/>
+            <a:ext cx="274320" cy="0"/>
+          </a:xfrm>
+          <a:prstGeom prst="line">
+            <a:avLst/>
+          </a:prstGeom>
+          <a:ln w="25400">
+            <a:solidFill>
+              <a:srgbClr val="556575"/>
+            </a:solidFill>
+            <a:tailEnd type="triangle"/>
+          </a:ln>
+        </p:spPr>
+        <p:style>
+          <a:lnRef idx="2">
+            <a:schemeClr val="accent1"/>
+          </a:lnRef>
+          <a:fillRef idx="0">
+            <a:schemeClr val="accent1"/>
+          </a:fillRef>
+          <a:effectRef idx="1">
+            <a:schemeClr val="accent1"/>
+          </a:effectRef>
+          <a:fontRef idx="minor">
+            <a:schemeClr val="tx1"/>
+          </a:fontRef>
+        </p:style>
+      </p:cxnSp>
+      <p:sp>
+        <p:nvSpPr>
+          <p:cNvPr id="6" name="Rounded Rectangle 5"/>
+          <p:cNvSpPr/>
+          <p:nvPr/>
+        </p:nvSpPr>
+        <p:spPr>
+          <a:xfrm>
+            <a:off x="3429000" y="1828800"/>
+            <a:ext cx="2468880" cy="822960"/>
+          </a:xfrm>
+          <a:prstGeom prst="roundRect">
+            <a:avLst>
+              <a:gd name="adj" fmla="val 6000"/>
+            </a:avLst>
+          </a:prstGeom>
+          <a:solidFill>
+            <a:srgbClr val="0B1F33"/>
+          </a:solidFill>
+          <a:ln>
+            <a:noFill/>
+          </a:ln>
+          <a:effectLst/>
+        </p:spPr>
+        <p:style>
+          <a:lnRef idx="1">
+            <a:schemeClr val="accent1"/>
+          </a:lnRef>
+          <a:fillRef idx="3">
+            <a:schemeClr val="accent1"/>
+          </a:fillRef>
+          <a:effectRef idx="2">
+            <a:schemeClr val="accent1"/>
+          </a:effectRef>
+          <a:fontRef idx="minor">
+            <a:schemeClr val="lt1"/>
+          </a:fontRef>
+        </p:style>
+        <p:txBody>
+          <a:bodyPr rtlCol="0" anchor="ctr" wrap="square" lIns="137160" tIns="91440" rIns="137160" bIns="91440"/>
+          <a:lstStyle/>
+          <a:p>
+            <a:pPr algn="ctr"/>
+            <a:r>
+              <a:rPr sz="2000" b="1" i="0">
+                <a:solidFill>
+                  <a:srgbClr val="FFFFFF"/>
+                </a:solidFill>
+                <a:latin typeface="Calibri"/>
+              </a:rPr>
+              <a:t>2  Disambiguate</a:t>
+            </a:r>
+          </a:p>
+        </p:txBody>
+      </p:sp>
+      <p:sp>
+        <p:nvSpPr>
+          <p:cNvPr id="7" name="TextBox 6"/>
+          <p:cNvSpPr txBox="1"/>
+          <p:nvPr/>
+        </p:nvSpPr>
+        <p:spPr>
+          <a:xfrm>
+            <a:off x="3429000" y="2880360"/>
+            <a:ext cx="2468880" cy="1828800"/>
+          </a:xfrm>
+          <a:prstGeom prst="rect">
+            <a:avLst/>
+          </a:prstGeom>
+          <a:noFill/>
+        </p:spPr>
+        <p:txBody>
+          <a:bodyPr wrap="square" anchor="t" lIns="0" tIns="0" rIns="0" bIns="0">
+            <a:spAutoFit/>
+          </a:bodyPr>
+          <a:lstStyle/>
+          <a:p>
+            <a:pPr algn="l"/>
+            <a:r>
+              <a:rPr sz="1600" b="0" i="0">
+                <a:solidFill>
+                  <a:srgbClr val="1B2A3A"/>
+                </a:solidFill>
+                <a:latin typeface="Calibri"/>
+              </a:rPr>
+              <a:t>Score how vague the wording is. Spot missing task, deadline or referent.</a:t>
+            </a:r>
+          </a:p>
+        </p:txBody>
+      </p:sp>
+      <p:cxnSp>
+        <p:nvCxnSpPr>
+          <p:cNvPr id="8" name="Connector 7"/>
+          <p:cNvCxnSpPr/>
+          <p:nvPr/>
+        </p:nvCxnSpPr>
+        <p:spPr>
+          <a:xfrm>
+            <a:off x="5943600" y="2240280"/>
+            <a:ext cx="274320" cy="0"/>
+          </a:xfrm>
+          <a:prstGeom prst="line">
+            <a:avLst/>
+          </a:prstGeom>
+          <a:ln w="25400">
+            <a:solidFill>
+              <a:srgbClr val="556575"/>
+            </a:solidFill>
+            <a:tailEnd type="triangle"/>
+          </a:ln>
+        </p:spPr>
+        <p:style>
+          <a:lnRef idx="2">
+            <a:schemeClr val="accent1"/>
+          </a:lnRef>
+          <a:fillRef idx="0">
+            <a:schemeClr val="accent1"/>
+          </a:fillRef>
+          <a:effectRef idx="1">
+            <a:schemeClr val="accent1"/>
+          </a:effectRef>
+          <a:fontRef idx="minor">
+            <a:schemeClr val="tx1"/>
+          </a:fontRef>
+        </p:style>
+      </p:cxnSp>
+      <p:sp>
+        <p:nvSpPr>
+          <p:cNvPr id="9" name="Rounded Rectangle 8"/>
+          <p:cNvSpPr/>
+          <p:nvPr/>
+        </p:nvSpPr>
+        <p:spPr>
+          <a:xfrm>
+            <a:off x="6217920" y="1828800"/>
+            <a:ext cx="2468880" cy="822960"/>
+          </a:xfrm>
+          <a:prstGeom prst="roundRect">
+            <a:avLst>
+              <a:gd name="adj" fmla="val 6000"/>
+            </a:avLst>
+          </a:prstGeom>
+          <a:solidFill>
+            <a:srgbClr val="0B1F33"/>
+          </a:solidFill>
+          <a:ln>
+            <a:noFill/>
+          </a:ln>
+          <a:effectLst/>
+        </p:spPr>
+        <p:style>
+          <a:lnRef idx="1">
+            <a:schemeClr val="accent1"/>
+          </a:lnRef>
+          <a:fillRef idx="3">
+            <a:schemeClr val="accent1"/>
+          </a:fillRef>
+          <a:effectRef idx="2">
+            <a:schemeClr val="accent1"/>
+          </a:effectRef>
+          <a:fontRef idx="minor">
+            <a:schemeClr val="lt1"/>
+          </a:fontRef>
+        </p:style>
+        <p:txBody>
+          <a:bodyPr rtlCol="0" anchor="ctr" wrap="square" lIns="137160" tIns="91440" rIns="137160" bIns="91440"/>
+          <a:lstStyle/>
+          <a:p>
+            <a:pPr algn="ctr"/>
+            <a:r>
+              <a:rPr sz="2000" b="1" i="0">
+                <a:solidFill>
+                  <a:srgbClr val="FFFFFF"/>
+                </a:solidFill>
+                <a:latin typeface="Calibri"/>
+              </a:rPr>
+              <a:t>3  Structure</a:t>
+            </a:r>
+          </a:p>
+        </p:txBody>
+      </p:sp>
+      <p:sp>
+        <p:nvSpPr>
+          <p:cNvPr id="10" name="TextBox 9"/>
+          <p:cNvSpPr txBox="1"/>
+          <p:nvPr/>
+        </p:nvSpPr>
+        <p:spPr>
+          <a:xfrm>
+            <a:off x="6217920" y="2880360"/>
+            <a:ext cx="2468880" cy="1828800"/>
+          </a:xfrm>
+          <a:prstGeom prst="rect">
+            <a:avLst/>
+          </a:prstGeom>
+          <a:noFill/>
+        </p:spPr>
+        <p:txBody>
+          <a:bodyPr wrap="square" anchor="t" lIns="0" tIns="0" rIns="0" bIns="0">
+            <a:spAutoFit/>
+          </a:bodyPr>
+          <a:lstStyle/>
+          <a:p>
+            <a:pPr algn="l"/>
+            <a:r>
+              <a:rPr sz="1600" b="0" i="0">
+                <a:solidFill>
+                  <a:srgbClr val="1B2A3A"/>
+                </a:solidFill>
+                <a:latin typeface="Calibri"/>
+              </a:rPr>
+              <a:t>Fill a fixed schema: actions, deadlines, interpretations, questions.</a:t>
+            </a:r>
+          </a:p>
+        </p:txBody>
+      </p:sp>
+      <p:cxnSp>
+        <p:nvCxnSpPr>
+          <p:cNvPr id="11" name="Connector 10"/>
+          <p:cNvCxnSpPr/>
+          <p:nvPr/>
+        </p:nvCxnSpPr>
+        <p:spPr>
+          <a:xfrm>
+            <a:off x="8732520" y="2240280"/>
+            <a:ext cx="274320" cy="0"/>
+          </a:xfrm>
+          <a:prstGeom prst="line">
+            <a:avLst/>
+          </a:prstGeom>
+          <a:ln w="25400">
+            <a:solidFill>
+              <a:srgbClr val="556575"/>
+            </a:solidFill>
+            <a:tailEnd type="triangle"/>
+          </a:ln>
+        </p:spPr>
+        <p:style>
+          <a:lnRef idx="2">
+            <a:schemeClr val="accent1"/>
+          </a:lnRef>
+          <a:fillRef idx="0">
+            <a:schemeClr val="accent1"/>
+          </a:fillRef>
+          <a:effectRef idx="1">
+            <a:schemeClr val="accent1"/>
+          </a:effectRef>
+          <a:fontRef idx="minor">
+            <a:schemeClr val="tx1"/>
+          </a:fontRef>
+        </p:style>
+      </p:cxnSp>
+      <p:sp>
+        <p:nvSpPr>
+          <p:cNvPr id="12" name="Rounded Rectangle 11"/>
+          <p:cNvSpPr/>
+          <p:nvPr/>
+        </p:nvSpPr>
+        <p:spPr>
+          <a:xfrm>
+            <a:off x="9006840" y="1828800"/>
+            <a:ext cx="2468880" cy="822960"/>
+          </a:xfrm>
+          <a:prstGeom prst="roundRect">
+            <a:avLst>
+              <a:gd name="adj" fmla="val 6000"/>
+            </a:avLst>
+          </a:prstGeom>
+          <a:solidFill>
+            <a:srgbClr val="0B1F33"/>
+          </a:solidFill>
+          <a:ln>
+            <a:noFill/>
+          </a:ln>
+          <a:effectLst/>
+        </p:spPr>
+        <p:style>
+          <a:lnRef idx="1">
+            <a:schemeClr val="accent1"/>
+          </a:lnRef>
+          <a:fillRef idx="3">
+            <a:schemeClr val="accent1"/>
+          </a:fillRef>
+          <a:effectRef idx="2">
+            <a:schemeClr val="accent1"/>
+          </a:effectRef>
+          <a:fontRef idx="minor">
+            <a:schemeClr val="lt1"/>
+          </a:fontRef>
+        </p:style>
+        <p:txBody>
+          <a:bodyPr rtlCol="0" anchor="ctr" wrap="square" lIns="137160" tIns="91440" rIns="137160" bIns="91440"/>
+          <a:lstStyle/>
+          <a:p>
+            <a:pPr algn="ctr"/>
+            <a:r>
+              <a:rPr sz="2000" b="1" i="0">
+                <a:solidFill>
+                  <a:srgbClr val="FFFFFF"/>
+                </a:solidFill>
+                <a:latin typeface="Calibri"/>
+              </a:rPr>
+              <a:t>4  Validate</a:t>
+            </a:r>
+          </a:p>
+        </p:txBody>
+      </p:sp>
+      <p:sp>
+        <p:nvSpPr>
+          <p:cNvPr id="13" name="TextBox 12"/>
+          <p:cNvSpPr txBox="1"/>
+          <p:nvPr/>
+        </p:nvSpPr>
+        <p:spPr>
+          <a:xfrm>
+            <a:off x="9006840" y="2880360"/>
+            <a:ext cx="2468880" cy="1828800"/>
+          </a:xfrm>
+          <a:prstGeom prst="rect">
+            <a:avLst/>
+          </a:prstGeom>
+          <a:noFill/>
+        </p:spPr>
+        <p:txBody>
+          <a:bodyPr wrap="square" anchor="t" lIns="0" tIns="0" rIns="0" bIns="0">
+            <a:spAutoFit/>
+          </a:bodyPr>
+          <a:lstStyle/>
+          <a:p>
+            <a:pPr algn="l"/>
+            <a:r>
+              <a:rPr sz="1600" b="0" i="0">
+                <a:solidFill>
+                  <a:srgbClr val="1B2A3A"/>
+                </a:solidFill>
+                <a:latin typeface="Calibri"/>
+              </a:rPr>
+              <a:t>Output must pass the schema, or the system falls back to rules.</a:t>
+            </a:r>
+          </a:p>
+        </p:txBody>
+      </p:sp>
+      <p:sp>
+        <p:nvSpPr>
+          <p:cNvPr id="14" name="Rounded Rectangle 13"/>
+          <p:cNvSpPr/>
+          <p:nvPr/>
+        </p:nvSpPr>
+        <p:spPr>
+          <a:xfrm>
+            <a:off x="640080" y="5029200"/>
+            <a:ext cx="10881360" cy="1005840"/>
+          </a:xfrm>
+          <a:prstGeom prst="roundRect">
+            <a:avLst>
+              <a:gd name="adj" fmla="val 6000"/>
+            </a:avLst>
+          </a:prstGeom>
+          <a:solidFill>
+            <a:srgbClr val="DDF1EE"/>
+          </a:solidFill>
+          <a:ln>
+            <a:noFill/>
+          </a:ln>
+          <a:effectLst/>
+        </p:spPr>
+        <p:style>
+          <a:lnRef idx="1">
+            <a:schemeClr val="accent1"/>
+          </a:lnRef>
+          <a:fillRef idx="3">
+            <a:schemeClr val="accent1"/>
+          </a:fillRef>
+          <a:effectRef idx="2">
+            <a:schemeClr val="accent1"/>
+          </a:effectRef>
+          <a:fontRef idx="minor">
+            <a:schemeClr val="lt1"/>
+          </a:fontRef>
+        </p:style>
+        <p:txBody>
+          <a:bodyPr rtlCol="0" anchor="ctr" wrap="square" lIns="320040" tIns="91440" rIns="320040" bIns="91440"/>
+          <a:lstStyle/>
+          <a:p>
+            <a:pPr algn="l"/>
+            <a:r>
+              <a:rPr sz="1800" b="1" i="0">
+                <a:solidFill>
+                  <a:srgbClr val="0B1F33"/>
+                </a:solidFill>
+                <a:latin typeface="Calibri"/>
+              </a:rPr>
+              <a:t>Not a chatbot. </a:t>
+            </a:r>
+            <a:r>
+              <a:rPr sz="1800" b="0" i="0">
+                <a:solidFill>
+                  <a:srgbClr val="1B2A3A"/>
+                </a:solidFill>
+                <a:latin typeface="Calibri"/>
+              </a:rPr>
+              <a:t>It returns the same fixed structure every time, so every field can be shown, checked and reused.</a:t>
             </a:r>
           </a:p>
         </p:txBody>
@@ -3922,7 +5405,7 @@
     <p:bg>
       <p:bgPr>
         <a:solidFill>
-          <a:srgbClr val="F8FAFC"/>
+          <a:srgbClr val="F5F7FA"/>
         </a:solidFill>
         <a:effectLst/>
       </p:bgPr>
@@ -3942,8 +5425,8 @@
         </p:nvSpPr>
         <p:spPr>
           <a:xfrm>
-            <a:off x="731520" y="457200"/>
-            <a:ext cx="10698480" cy="1097280"/>
+            <a:off x="640080" y="457200"/>
+            <a:ext cx="10881360" cy="822960"/>
           </a:xfrm>
           <a:prstGeom prst="rect">
             <a:avLst/>
@@ -3951,128 +5434,473 @@
           <a:noFill/>
         </p:spPr>
         <p:txBody>
-          <a:bodyPr wrap="square" lIns="0" tIns="0" rIns="0" bIns="0">
+          <a:bodyPr wrap="square" anchor="ctr" lIns="0" tIns="0" rIns="0" bIns="0">
             <a:spAutoFit/>
           </a:bodyPr>
           <a:lstStyle/>
           <a:p>
-            <a:pPr>
-              <a:defRPr sz="1100" b="1">
-                <a:solidFill>
-                  <a:srgbClr val="E02020"/>
-                </a:solidFill>
-              </a:defRPr>
+            <a:pPr algn="l"/>
+            <a:r>
+              <a:rPr sz="3400" b="1" i="0">
+                <a:solidFill>
+                  <a:srgbClr val="0B1F33"/>
+                </a:solidFill>
+                <a:latin typeface="Cambria"/>
+              </a:rPr>
+              <a:t>Known  ≠  Inferred  ≠  Unknown</a:t>
+            </a:r>
+          </a:p>
+        </p:txBody>
+      </p:sp>
+      <p:sp>
+        <p:nvSpPr>
+          <p:cNvPr id="3" name="Rounded Rectangle 2"/>
+          <p:cNvSpPr/>
+          <p:nvPr/>
+        </p:nvSpPr>
+        <p:spPr>
+          <a:xfrm>
+            <a:off x="640080" y="1737360"/>
+            <a:ext cx="3520440" cy="4114800"/>
+          </a:xfrm>
+          <a:prstGeom prst="roundRect">
+            <a:avLst>
+              <a:gd name="adj" fmla="val 6000"/>
+            </a:avLst>
+          </a:prstGeom>
+          <a:solidFill>
+            <a:srgbClr val="0E8F83"/>
+          </a:solidFill>
+          <a:ln>
+            <a:noFill/>
+          </a:ln>
+          <a:effectLst/>
+        </p:spPr>
+        <p:style>
+          <a:lnRef idx="1">
+            <a:schemeClr val="accent1"/>
+          </a:lnRef>
+          <a:fillRef idx="3">
+            <a:schemeClr val="accent1"/>
+          </a:fillRef>
+          <a:effectRef idx="2">
+            <a:schemeClr val="accent1"/>
+          </a:effectRef>
+          <a:fontRef idx="minor">
+            <a:schemeClr val="lt1"/>
+          </a:fontRef>
+        </p:style>
+        <p:txBody>
+          <a:bodyPr rtlCol="0" anchor="t" wrap="square" lIns="320040" tIns="320040" rIns="320040" bIns="274320"/>
+          <a:lstStyle/>
+          <a:p>
+            <a:pPr algn="l"/>
+            <a:r>
+              <a:rPr sz="3000" b="1" i="0">
+                <a:solidFill>
+                  <a:srgbClr val="FFFFFF"/>
+                </a:solidFill>
+                <a:latin typeface="Cambria"/>
+              </a:rPr>
+              <a:t>KNOWN</a:t>
+            </a:r>
+          </a:p>
+          <a:p>
+            <a:pPr algn="l">
+              <a:spcBef>
+                <a:spcPts val="600"/>
+              </a:spcBef>
             </a:pPr>
             <a:r>
-              <a:t>NEUROLENS | SNAPDRAGON AI LAB 2026</a:t>
-            </a:r>
-          </a:p>
-          <a:p>
-            <a:pPr>
-              <a:defRPr sz="2800" b="1">
-                <a:solidFill>
-                  <a:srgbClr val="101828"/>
-                </a:solidFill>
-              </a:defRPr>
+              <a:rPr sz="1600" b="1" i="0">
+                <a:solidFill>
+                  <a:srgbClr val="FFFFFF"/>
+                </a:solidFill>
+                <a:latin typeface="Calibri"/>
+              </a:rPr>
+              <a:t>What is stated</a:t>
+            </a:r>
+          </a:p>
+          <a:p>
+            <a:pPr algn="l">
+              <a:spcBef>
+                <a:spcPts val="600"/>
+              </a:spcBef>
             </a:pPr>
             <a:r>
-              <a:t>Core Innovation: Known ≠ Inferred ≠ Unknown</a:t>
-            </a:r>
-          </a:p>
-        </p:txBody>
-      </p:sp>
-      <p:sp>
-        <p:nvSpPr>
-          <p:cNvPr id="3" name="TextBox 2"/>
-          <p:cNvSpPr txBox="1"/>
+              <a:rPr sz="600" b="0" i="0">
+                <a:solidFill>
+                  <a:srgbClr val="FFFFFF"/>
+                </a:solidFill>
+                <a:latin typeface="Calibri"/>
+              </a:rPr>
+              <a:t/>
+            </a:r>
+          </a:p>
+          <a:p>
+            <a:pPr algn="l">
+              <a:spcBef>
+                <a:spcPts val="600"/>
+              </a:spcBef>
+            </a:pPr>
+            <a:r>
+              <a:rPr sz="1700" b="0" i="0">
+                <a:solidFill>
+                  <a:srgbClr val="FFFFFF"/>
+                </a:solidFill>
+                <a:latin typeface="Calibri"/>
+              </a:rPr>
+              <a:t>Literal meaning, explicit tasks, deadlines found by rules.</a:t>
+            </a:r>
+          </a:p>
+          <a:p>
+            <a:pPr algn="l">
+              <a:spcBef>
+                <a:spcPts val="600"/>
+              </a:spcBef>
+            </a:pPr>
+            <a:r>
+              <a:rPr sz="1000" b="0" i="0">
+                <a:solidFill>
+                  <a:srgbClr val="FFFFFF"/>
+                </a:solidFill>
+                <a:latin typeface="Calibri"/>
+              </a:rPr>
+              <a:t/>
+            </a:r>
+          </a:p>
+          <a:p>
+            <a:pPr algn="l">
+              <a:spcBef>
+                <a:spcPts val="600"/>
+              </a:spcBef>
+            </a:pPr>
+            <a:r>
+              <a:rPr sz="1200" b="1" i="0">
+                <a:solidFill>
+                  <a:srgbClr val="FFFFFF"/>
+                </a:solidFill>
+                <a:latin typeface="Calibri"/>
+              </a:rPr>
+              <a:t>From the meeting example</a:t>
+            </a:r>
+          </a:p>
+          <a:p>
+            <a:pPr algn="l">
+              <a:spcBef>
+                <a:spcPts val="600"/>
+              </a:spcBef>
+            </a:pPr>
+            <a:r>
+              <a:rPr sz="1600" b="0" i="1">
+                <a:solidFill>
+                  <a:srgbClr val="FFFFFF"/>
+                </a:solidFill>
+                <a:latin typeface="Calibri"/>
+              </a:rPr>
+              <a:t>Deadline: Friday</a:t>
+            </a:r>
+          </a:p>
+        </p:txBody>
+      </p:sp>
+      <p:sp>
+        <p:nvSpPr>
+          <p:cNvPr id="4" name="Rounded Rectangle 3"/>
+          <p:cNvSpPr/>
           <p:nvPr/>
         </p:nvSpPr>
         <p:spPr>
           <a:xfrm>
-            <a:off x="731520" y="1828800"/>
-            <a:ext cx="10698480" cy="4389120"/>
-          </a:xfrm>
-          <a:prstGeom prst="rect">
-            <a:avLst/>
+            <a:off x="4315968" y="1737360"/>
+            <a:ext cx="3520440" cy="4114800"/>
+          </a:xfrm>
+          <a:prstGeom prst="roundRect">
+            <a:avLst>
+              <a:gd name="adj" fmla="val 6000"/>
+            </a:avLst>
           </a:prstGeom>
-          <a:noFill/>
-        </p:spPr>
-        <p:txBody>
-          <a:bodyPr wrap="square">
-            <a:spAutoFit/>
-          </a:bodyPr>
-          <a:lstStyle/>
-          <a:p/>
-          <a:p>
-            <a:pPr>
+          <a:solidFill>
+            <a:srgbClr val="F2B134"/>
+          </a:solidFill>
+          <a:ln>
+            <a:noFill/>
+          </a:ln>
+          <a:effectLst/>
+        </p:spPr>
+        <p:style>
+          <a:lnRef idx="1">
+            <a:schemeClr val="accent1"/>
+          </a:lnRef>
+          <a:fillRef idx="3">
+            <a:schemeClr val="accent1"/>
+          </a:fillRef>
+          <a:effectRef idx="2">
+            <a:schemeClr val="accent1"/>
+          </a:effectRef>
+          <a:fontRef idx="minor">
+            <a:schemeClr val="lt1"/>
+          </a:fontRef>
+        </p:style>
+        <p:txBody>
+          <a:bodyPr rtlCol="0" anchor="t" wrap="square" lIns="320040" tIns="320040" rIns="320040" bIns="274320"/>
+          <a:lstStyle/>
+          <a:p>
+            <a:pPr algn="l"/>
+            <a:r>
+              <a:rPr sz="3000" b="1" i="0">
+                <a:solidFill>
+                  <a:srgbClr val="1B2A3A"/>
+                </a:solidFill>
+                <a:latin typeface="Cambria"/>
+              </a:rPr>
+              <a:t>INFERRED</a:t>
+            </a:r>
+          </a:p>
+          <a:p>
+            <a:pPr algn="l">
               <a:spcBef>
-                <a:spcPts val="1200"/>
+                <a:spcPts val="600"/>
               </a:spcBef>
-              <a:defRPr b="1" sz="1700">
-                <a:solidFill>
-                  <a:srgbClr val="101828"/>
-                </a:solidFill>
-              </a:defRPr>
             </a:pPr>
             <a:r>
-              <a:t>1. KNOWN (Factual &amp; Explicit)</a:t>
-            </a:r>
-            <a:br/>
-            <a:r>
-              <a:rPr b="0" sz="1500">
-                <a:solidFill>
-                  <a:srgbClr val="475467"/>
-                </a:solidFill>
-              </a:rPr>
-              <a:t>   Literal meaning, explicit task requirements, and deterministic deadlines ('before Friday').</a:t>
-            </a:r>
-          </a:p>
-          <a:p>
-            <a:pPr>
+              <a:rPr sz="1600" b="1" i="0">
+                <a:solidFill>
+                  <a:srgbClr val="1B2A3A"/>
+                </a:solidFill>
+                <a:latin typeface="Calibri"/>
+              </a:rPr>
+              <a:t>What is possible</a:t>
+            </a:r>
+          </a:p>
+          <a:p>
+            <a:pPr algn="l">
               <a:spcBef>
-                <a:spcPts val="1200"/>
+                <a:spcPts val="600"/>
               </a:spcBef>
-              <a:defRPr b="1" sz="1700">
-                <a:solidFill>
-                  <a:srgbClr val="101828"/>
-                </a:solidFill>
-              </a:defRPr>
             </a:pPr>
             <a:r>
-              <a:t>2. INFERRED (Possibility-Based with Evidence)</a:t>
-            </a:r>
-            <a:br/>
-            <a:r>
-              <a:rPr b="0" sz="1500">
-                <a:solidFill>
-                  <a:srgbClr val="475467"/>
-                </a:solidFill>
-              </a:rPr>
-              <a:t>   Probabilistic interpretations with attached confidence and verbatim quotes ('Priority request: 82% confidence, backed by before Friday').</a:t>
-            </a:r>
-          </a:p>
-          <a:p>
-            <a:pPr>
+              <a:rPr sz="600" b="0" i="0">
+                <a:solidFill>
+                  <a:srgbClr val="1B2A3A"/>
+                </a:solidFill>
+                <a:latin typeface="Calibri"/>
+              </a:rPr>
+              <a:t/>
+            </a:r>
+          </a:p>
+          <a:p>
+            <a:pPr algn="l">
               <a:spcBef>
-                <a:spcPts val="1200"/>
+                <a:spcPts val="600"/>
               </a:spcBef>
-              <a:defRPr b="1" sz="1700">
-                <a:solidFill>
-                  <a:srgbClr val="101828"/>
-                </a:solidFill>
-              </a:defRPr>
             </a:pPr>
             <a:r>
-              <a:t>3. UNKNOWN (Zero-Hallucination Ambiguity)</a:t>
-            </a:r>
-            <a:br/>
-            <a:r>
-              <a:rPr b="0" sz="1500">
-                <a:solidFill>
-                  <a:srgbClr val="475467"/>
-                </a:solidFill>
-              </a:rPr>
-              <a:t>   When instructions are vague, NeuroLens generates targeted clarifying questions instead of guessing intent ('What specific changes are needed in section 1?').</a:t>
+              <a:rPr sz="1700" b="0" i="0">
+                <a:solidFill>
+                  <a:srgbClr val="1B2A3A"/>
+                </a:solidFill>
+                <a:latin typeface="Calibri"/>
+              </a:rPr>
+              <a:t>Readings of vague wording, always with the words that support them.</a:t>
+            </a:r>
+          </a:p>
+          <a:p>
+            <a:pPr algn="l">
+              <a:spcBef>
+                <a:spcPts val="600"/>
+              </a:spcBef>
+            </a:pPr>
+            <a:r>
+              <a:rPr sz="1000" b="0" i="0">
+                <a:solidFill>
+                  <a:srgbClr val="1B2A3A"/>
+                </a:solidFill>
+                <a:latin typeface="Calibri"/>
+              </a:rPr>
+              <a:t/>
+            </a:r>
+          </a:p>
+          <a:p>
+            <a:pPr algn="l">
+              <a:spcBef>
+                <a:spcPts val="600"/>
+              </a:spcBef>
+            </a:pPr>
+            <a:r>
+              <a:rPr sz="1200" b="1" i="0">
+                <a:solidFill>
+                  <a:srgbClr val="1B2A3A"/>
+                </a:solidFill>
+                <a:latin typeface="Calibri"/>
+              </a:rPr>
+              <a:t>From the meeting example</a:t>
+            </a:r>
+          </a:p>
+          <a:p>
+            <a:pPr algn="l">
+              <a:spcBef>
+                <a:spcPts val="600"/>
+              </a:spcBef>
+            </a:pPr>
+            <a:r>
+              <a:rPr sz="1600" b="0" i="1">
+                <a:solidFill>
+                  <a:srgbClr val="1B2A3A"/>
+                </a:solidFill>
+                <a:latin typeface="Calibri"/>
+              </a:rPr>
+              <a:t>May be a real request, not just a suggestion</a:t>
+            </a:r>
+          </a:p>
+        </p:txBody>
+      </p:sp>
+      <p:sp>
+        <p:nvSpPr>
+          <p:cNvPr id="5" name="Rounded Rectangle 4"/>
+          <p:cNvSpPr/>
+          <p:nvPr/>
+        </p:nvSpPr>
+        <p:spPr>
+          <a:xfrm>
+            <a:off x="7991855" y="1737360"/>
+            <a:ext cx="3520440" cy="4114800"/>
+          </a:xfrm>
+          <a:prstGeom prst="roundRect">
+            <a:avLst>
+              <a:gd name="adj" fmla="val 6000"/>
+            </a:avLst>
+          </a:prstGeom>
+          <a:solidFill>
+            <a:srgbClr val="C04B3B"/>
+          </a:solidFill>
+          <a:ln>
+            <a:noFill/>
+          </a:ln>
+          <a:effectLst/>
+        </p:spPr>
+        <p:style>
+          <a:lnRef idx="1">
+            <a:schemeClr val="accent1"/>
+          </a:lnRef>
+          <a:fillRef idx="3">
+            <a:schemeClr val="accent1"/>
+          </a:fillRef>
+          <a:effectRef idx="2">
+            <a:schemeClr val="accent1"/>
+          </a:effectRef>
+          <a:fontRef idx="minor">
+            <a:schemeClr val="lt1"/>
+          </a:fontRef>
+        </p:style>
+        <p:txBody>
+          <a:bodyPr rtlCol="0" anchor="t" wrap="square" lIns="320040" tIns="320040" rIns="320040" bIns="274320"/>
+          <a:lstStyle/>
+          <a:p>
+            <a:pPr algn="l"/>
+            <a:r>
+              <a:rPr sz="3000" b="1" i="0">
+                <a:solidFill>
+                  <a:srgbClr val="FFFFFF"/>
+                </a:solidFill>
+                <a:latin typeface="Cambria"/>
+              </a:rPr>
+              <a:t>UNKNOWN</a:t>
+            </a:r>
+          </a:p>
+          <a:p>
+            <a:pPr algn="l">
+              <a:spcBef>
+                <a:spcPts val="600"/>
+              </a:spcBef>
+            </a:pPr>
+            <a:r>
+              <a:rPr sz="1600" b="1" i="0">
+                <a:solidFill>
+                  <a:srgbClr val="FFFFFF"/>
+                </a:solidFill>
+                <a:latin typeface="Calibri"/>
+              </a:rPr>
+              <a:t>What is missing</a:t>
+            </a:r>
+          </a:p>
+          <a:p>
+            <a:pPr algn="l">
+              <a:spcBef>
+                <a:spcPts val="600"/>
+              </a:spcBef>
+            </a:pPr>
+            <a:r>
+              <a:rPr sz="600" b="0" i="0">
+                <a:solidFill>
+                  <a:srgbClr val="FFFFFF"/>
+                </a:solidFill>
+                <a:latin typeface="Calibri"/>
+              </a:rPr>
+              <a:t/>
+            </a:r>
+          </a:p>
+          <a:p>
+            <a:pPr algn="l">
+              <a:spcBef>
+                <a:spcPts val="600"/>
+              </a:spcBef>
+            </a:pPr>
+            <a:r>
+              <a:rPr sz="1700" b="0" i="0">
+                <a:solidFill>
+                  <a:srgbClr val="FFFFFF"/>
+                </a:solidFill>
+                <a:latin typeface="Calibri"/>
+              </a:rPr>
+              <a:t>Gaps become a question, not a guess.</a:t>
+            </a:r>
+          </a:p>
+          <a:p>
+            <a:pPr algn="l">
+              <a:spcBef>
+                <a:spcPts val="600"/>
+              </a:spcBef>
+            </a:pPr>
+            <a:r>
+              <a:rPr sz="1000" b="0" i="0">
+                <a:solidFill>
+                  <a:srgbClr val="FFFFFF"/>
+                </a:solidFill>
+                <a:latin typeface="Calibri"/>
+              </a:rPr>
+              <a:t/>
+            </a:r>
+          </a:p>
+          <a:p>
+            <a:pPr algn="l">
+              <a:spcBef>
+                <a:spcPts val="600"/>
+              </a:spcBef>
+            </a:pPr>
+            <a:r>
+              <a:rPr sz="1200" b="1" i="0">
+                <a:solidFill>
+                  <a:srgbClr val="FFFFFF"/>
+                </a:solidFill>
+                <a:latin typeface="Calibri"/>
+              </a:rPr>
+              <a:t>From the meeting example</a:t>
+            </a:r>
+          </a:p>
+          <a:p>
+            <a:pPr algn="l">
+              <a:spcBef>
+                <a:spcPts val="600"/>
+              </a:spcBef>
+            </a:pPr>
+            <a:r>
+              <a:rPr sz="1600" b="0" i="1">
+                <a:solidFill>
+                  <a:srgbClr val="FFFFFF"/>
+                </a:solidFill>
+                <a:latin typeface="Calibri"/>
+              </a:rPr>
+              <a:t>“Which part should be changed, and how?”</a:t>
             </a:r>
           </a:p>
         </p:txBody>
@@ -4091,7 +5919,7 @@
     <p:bg>
       <p:bgPr>
         <a:solidFill>
-          <a:srgbClr val="F8FAFC"/>
+          <a:srgbClr val="FFFFFF"/>
         </a:solidFill>
         <a:effectLst/>
       </p:bgPr>
@@ -4111,8 +5939,8 @@
         </p:nvSpPr>
         <p:spPr>
           <a:xfrm>
-            <a:off x="731520" y="457200"/>
-            <a:ext cx="10698480" cy="1097280"/>
+            <a:off x="640080" y="457200"/>
+            <a:ext cx="10881360" cy="822960"/>
           </a:xfrm>
           <a:prstGeom prst="rect">
             <a:avLst/>
@@ -4120,46 +5948,959 @@
           <a:noFill/>
         </p:spPr>
         <p:txBody>
-          <a:bodyPr wrap="square" lIns="0" tIns="0" rIns="0" bIns="0">
+          <a:bodyPr wrap="square" anchor="ctr" lIns="0" tIns="0" rIns="0" bIns="0">
             <a:spAutoFit/>
           </a:bodyPr>
           <a:lstStyle/>
           <a:p>
-            <a:pPr>
-              <a:defRPr sz="1100" b="1">
-                <a:solidFill>
-                  <a:srgbClr val="E02020"/>
-                </a:solidFill>
-              </a:defRPr>
+            <a:pPr algn="l"/>
+            <a:r>
+              <a:rPr sz="3400" b="1" i="0">
+                <a:solidFill>
+                  <a:srgbClr val="0B1F33"/>
+                </a:solidFill>
+                <a:latin typeface="Cambria"/>
+              </a:rPr>
+              <a:t>Architecture: what exists and what is planned</a:t>
+            </a:r>
+          </a:p>
+        </p:txBody>
+      </p:sp>
+      <p:sp>
+        <p:nvSpPr>
+          <p:cNvPr id="3" name="Rounded Rectangle 2"/>
+          <p:cNvSpPr/>
+          <p:nvPr/>
+        </p:nvSpPr>
+        <p:spPr>
+          <a:xfrm>
+            <a:off x="640080" y="1554480"/>
+            <a:ext cx="1737360" cy="914400"/>
+          </a:xfrm>
+          <a:prstGeom prst="roundRect">
+            <a:avLst>
+              <a:gd name="adj" fmla="val 6000"/>
+            </a:avLst>
+          </a:prstGeom>
+          <a:solidFill>
+            <a:srgbClr val="FFFFFF"/>
+          </a:solidFill>
+          <a:ln w="15875">
+            <a:solidFill>
+              <a:srgbClr val="556575"/>
+            </a:solidFill>
+            <a:prstDash val="dash"/>
+          </a:ln>
+          <a:effectLst/>
+        </p:spPr>
+        <p:style>
+          <a:lnRef idx="1">
+            <a:schemeClr val="accent1"/>
+          </a:lnRef>
+          <a:fillRef idx="3">
+            <a:schemeClr val="accent1"/>
+          </a:fillRef>
+          <a:effectRef idx="2">
+            <a:schemeClr val="accent1"/>
+          </a:effectRef>
+          <a:fontRef idx="minor">
+            <a:schemeClr val="lt1"/>
+          </a:fontRef>
+        </p:style>
+        <p:txBody>
+          <a:bodyPr rtlCol="0" anchor="ctr" wrap="square" lIns="137160" tIns="91440" rIns="137160" bIns="91440"/>
+          <a:lstStyle/>
+          <a:p>
+            <a:pPr algn="ctr"/>
+            <a:r>
+              <a:rPr sz="1600" b="1" i="0">
+                <a:solidFill>
+                  <a:srgbClr val="1B2A3A"/>
+                </a:solidFill>
+                <a:latin typeface="Calibri"/>
+              </a:rPr>
+              <a:t>Microphone</a:t>
+            </a:r>
+          </a:p>
+        </p:txBody>
+      </p:sp>
+      <p:sp>
+        <p:nvSpPr>
+          <p:cNvPr id="4" name="Rounded Rectangle 3"/>
+          <p:cNvSpPr/>
+          <p:nvPr/>
+        </p:nvSpPr>
+        <p:spPr>
+          <a:xfrm>
+            <a:off x="2743200" y="1554480"/>
+            <a:ext cx="1463040" cy="914400"/>
+          </a:xfrm>
+          <a:prstGeom prst="roundRect">
+            <a:avLst>
+              <a:gd name="adj" fmla="val 6000"/>
+            </a:avLst>
+          </a:prstGeom>
+          <a:solidFill>
+            <a:srgbClr val="FFFFFF"/>
+          </a:solidFill>
+          <a:ln w="15875">
+            <a:solidFill>
+              <a:srgbClr val="556575"/>
+            </a:solidFill>
+            <a:prstDash val="dash"/>
+          </a:ln>
+          <a:effectLst/>
+        </p:spPr>
+        <p:style>
+          <a:lnRef idx="1">
+            <a:schemeClr val="accent1"/>
+          </a:lnRef>
+          <a:fillRef idx="3">
+            <a:schemeClr val="accent1"/>
+          </a:fillRef>
+          <a:effectRef idx="2">
+            <a:schemeClr val="accent1"/>
+          </a:effectRef>
+          <a:fontRef idx="minor">
+            <a:schemeClr val="lt1"/>
+          </a:fontRef>
+        </p:style>
+        <p:txBody>
+          <a:bodyPr rtlCol="0" anchor="ctr" wrap="square" lIns="137160" tIns="91440" rIns="137160" bIns="91440"/>
+          <a:lstStyle/>
+          <a:p>
+            <a:pPr algn="ctr"/>
+            <a:r>
+              <a:rPr sz="1600" b="1" i="0">
+                <a:solidFill>
+                  <a:srgbClr val="1B2A3A"/>
+                </a:solidFill>
+                <a:latin typeface="Calibri"/>
+              </a:rPr>
+              <a:t>VAD</a:t>
+            </a:r>
+          </a:p>
+        </p:txBody>
+      </p:sp>
+      <p:sp>
+        <p:nvSpPr>
+          <p:cNvPr id="5" name="Rounded Rectangle 4"/>
+          <p:cNvSpPr/>
+          <p:nvPr/>
+        </p:nvSpPr>
+        <p:spPr>
+          <a:xfrm>
+            <a:off x="4572000" y="1554480"/>
+            <a:ext cx="1828800" cy="914400"/>
+          </a:xfrm>
+          <a:prstGeom prst="roundRect">
+            <a:avLst>
+              <a:gd name="adj" fmla="val 6000"/>
+            </a:avLst>
+          </a:prstGeom>
+          <a:solidFill>
+            <a:srgbClr val="FFFFFF"/>
+          </a:solidFill>
+          <a:ln w="15875">
+            <a:solidFill>
+              <a:srgbClr val="556575"/>
+            </a:solidFill>
+            <a:prstDash val="dash"/>
+          </a:ln>
+          <a:effectLst/>
+        </p:spPr>
+        <p:style>
+          <a:lnRef idx="1">
+            <a:schemeClr val="accent1"/>
+          </a:lnRef>
+          <a:fillRef idx="3">
+            <a:schemeClr val="accent1"/>
+          </a:fillRef>
+          <a:effectRef idx="2">
+            <a:schemeClr val="accent1"/>
+          </a:effectRef>
+          <a:fontRef idx="minor">
+            <a:schemeClr val="lt1"/>
+          </a:fontRef>
+        </p:style>
+        <p:txBody>
+          <a:bodyPr rtlCol="0" anchor="ctr" wrap="square" lIns="137160" tIns="91440" rIns="137160" bIns="91440"/>
+          <a:lstStyle/>
+          <a:p>
+            <a:pPr algn="ctr"/>
+            <a:r>
+              <a:rPr sz="1600" b="1" i="0">
+                <a:solidFill>
+                  <a:srgbClr val="1B2A3A"/>
+                </a:solidFill>
+                <a:latin typeface="Calibri"/>
+              </a:rPr>
+              <a:t>Whisper-Base</a:t>
+            </a:r>
+          </a:p>
+          <a:p>
+            <a:pPr algn="ctr">
+              <a:spcBef>
+                <a:spcPts val="600"/>
+              </a:spcBef>
             </a:pPr>
             <a:r>
-              <a:t>NEUROLENS | SNAPDRAGON AI LAB 2026</a:t>
-            </a:r>
-          </a:p>
-          <a:p>
-            <a:pPr>
-              <a:defRPr sz="2800" b="1">
-                <a:solidFill>
-                  <a:srgbClr val="101828"/>
-                </a:solidFill>
-              </a:defRPr>
+              <a:rPr sz="1200" b="0" i="0">
+                <a:solidFill>
+                  <a:srgbClr val="556575"/>
+                </a:solidFill>
+                <a:latin typeface="Calibri"/>
+              </a:rPr>
+              <a:t>speech to text</a:t>
+            </a:r>
+          </a:p>
+        </p:txBody>
+      </p:sp>
+      <p:sp>
+        <p:nvSpPr>
+          <p:cNvPr id="6" name="Rounded Rectangle 5"/>
+          <p:cNvSpPr/>
+          <p:nvPr/>
+        </p:nvSpPr>
+        <p:spPr>
+          <a:xfrm>
+            <a:off x="640080" y="3017520"/>
+            <a:ext cx="1737360" cy="914400"/>
+          </a:xfrm>
+          <a:prstGeom prst="roundRect">
+            <a:avLst>
+              <a:gd name="adj" fmla="val 6000"/>
+            </a:avLst>
+          </a:prstGeom>
+          <a:solidFill>
+            <a:srgbClr val="FFFFFF"/>
+          </a:solidFill>
+          <a:ln w="15875">
+            <a:solidFill>
+              <a:srgbClr val="556575"/>
+            </a:solidFill>
+            <a:prstDash val="dash"/>
+          </a:ln>
+          <a:effectLst/>
+        </p:spPr>
+        <p:style>
+          <a:lnRef idx="1">
+            <a:schemeClr val="accent1"/>
+          </a:lnRef>
+          <a:fillRef idx="3">
+            <a:schemeClr val="accent1"/>
+          </a:fillRef>
+          <a:effectRef idx="2">
+            <a:schemeClr val="accent1"/>
+          </a:effectRef>
+          <a:fontRef idx="minor">
+            <a:schemeClr val="lt1"/>
+          </a:fontRef>
+        </p:style>
+        <p:txBody>
+          <a:bodyPr rtlCol="0" anchor="ctr" wrap="square" lIns="137160" tIns="91440" rIns="137160" bIns="91440"/>
+          <a:lstStyle/>
+          <a:p>
+            <a:pPr algn="ctr"/>
+            <a:r>
+              <a:rPr sz="1600" b="1" i="0">
+                <a:solidFill>
+                  <a:srgbClr val="1B2A3A"/>
+                </a:solidFill>
+                <a:latin typeface="Calibri"/>
+              </a:rPr>
+              <a:t>Screenshot</a:t>
+            </a:r>
+          </a:p>
+          <a:p>
+            <a:pPr algn="ctr">
+              <a:spcBef>
+                <a:spcPts val="600"/>
+              </a:spcBef>
             </a:pPr>
             <a:r>
-              <a:t>Snapdragon® Hardware Architecture &amp; NPU Pathway</a:t>
-            </a:r>
-          </a:p>
-        </p:txBody>
-      </p:sp>
-      <p:sp>
-        <p:nvSpPr>
-          <p:cNvPr id="3" name="TextBox 2"/>
+              <a:rPr sz="1200" b="0" i="0">
+                <a:solidFill>
+                  <a:srgbClr val="556575"/>
+                </a:solidFill>
+                <a:latin typeface="Calibri"/>
+              </a:rPr>
+              <a:t>user-selected</a:t>
+            </a:r>
+          </a:p>
+        </p:txBody>
+      </p:sp>
+      <p:sp>
+        <p:nvSpPr>
+          <p:cNvPr id="7" name="Rounded Rectangle 6"/>
+          <p:cNvSpPr/>
+          <p:nvPr/>
+        </p:nvSpPr>
+        <p:spPr>
+          <a:xfrm>
+            <a:off x="4572000" y="3017520"/>
+            <a:ext cx="1828800" cy="914400"/>
+          </a:xfrm>
+          <a:prstGeom prst="roundRect">
+            <a:avLst>
+              <a:gd name="adj" fmla="val 6000"/>
+            </a:avLst>
+          </a:prstGeom>
+          <a:solidFill>
+            <a:srgbClr val="FFFFFF"/>
+          </a:solidFill>
+          <a:ln w="15875">
+            <a:solidFill>
+              <a:srgbClr val="556575"/>
+            </a:solidFill>
+            <a:prstDash val="dash"/>
+          </a:ln>
+          <a:effectLst/>
+        </p:spPr>
+        <p:style>
+          <a:lnRef idx="1">
+            <a:schemeClr val="accent1"/>
+          </a:lnRef>
+          <a:fillRef idx="3">
+            <a:schemeClr val="accent1"/>
+          </a:fillRef>
+          <a:effectRef idx="2">
+            <a:schemeClr val="accent1"/>
+          </a:effectRef>
+          <a:fontRef idx="minor">
+            <a:schemeClr val="lt1"/>
+          </a:fontRef>
+        </p:style>
+        <p:txBody>
+          <a:bodyPr rtlCol="0" anchor="ctr" wrap="square" lIns="137160" tIns="91440" rIns="137160" bIns="91440"/>
+          <a:lstStyle/>
+          <a:p>
+            <a:pPr algn="ctr"/>
+            <a:r>
+              <a:rPr sz="1600" b="1" i="0">
+                <a:solidFill>
+                  <a:srgbClr val="1B2A3A"/>
+                </a:solidFill>
+                <a:latin typeface="Calibri"/>
+              </a:rPr>
+              <a:t>Qwen3-VL-4B</a:t>
+            </a:r>
+          </a:p>
+          <a:p>
+            <a:pPr algn="ctr">
+              <a:spcBef>
+                <a:spcPts val="600"/>
+              </a:spcBef>
+            </a:pPr>
+            <a:r>
+              <a:rPr sz="1200" b="0" i="0">
+                <a:solidFill>
+                  <a:srgbClr val="556575"/>
+                </a:solidFill>
+                <a:latin typeface="Calibri"/>
+              </a:rPr>
+              <a:t>screen to text</a:t>
+            </a:r>
+          </a:p>
+        </p:txBody>
+      </p:sp>
+      <p:sp>
+        <p:nvSpPr>
+          <p:cNvPr id="8" name="Rounded Rectangle 7"/>
+          <p:cNvSpPr/>
+          <p:nvPr/>
+        </p:nvSpPr>
+        <p:spPr>
+          <a:xfrm>
+            <a:off x="4572000" y="4480560"/>
+            <a:ext cx="1828800" cy="914400"/>
+          </a:xfrm>
+          <a:prstGeom prst="roundRect">
+            <a:avLst>
+              <a:gd name="adj" fmla="val 6000"/>
+            </a:avLst>
+          </a:prstGeom>
+          <a:solidFill>
+            <a:srgbClr val="0E8F83"/>
+          </a:solidFill>
+          <a:ln>
+            <a:noFill/>
+          </a:ln>
+          <a:effectLst/>
+        </p:spPr>
+        <p:style>
+          <a:lnRef idx="1">
+            <a:schemeClr val="accent1"/>
+          </a:lnRef>
+          <a:fillRef idx="3">
+            <a:schemeClr val="accent1"/>
+          </a:fillRef>
+          <a:effectRef idx="2">
+            <a:schemeClr val="accent1"/>
+          </a:effectRef>
+          <a:fontRef idx="minor">
+            <a:schemeClr val="lt1"/>
+          </a:fontRef>
+        </p:style>
+        <p:txBody>
+          <a:bodyPr rtlCol="0" anchor="ctr" wrap="square" lIns="137160" tIns="91440" rIns="137160" bIns="91440"/>
+          <a:lstStyle/>
+          <a:p>
+            <a:pPr algn="ctr"/>
+            <a:r>
+              <a:rPr sz="1600" b="1" i="0">
+                <a:solidFill>
+                  <a:srgbClr val="FFFFFF"/>
+                </a:solidFill>
+                <a:latin typeface="Calibri"/>
+              </a:rPr>
+              <a:t>Typed text</a:t>
+            </a:r>
+          </a:p>
+        </p:txBody>
+      </p:sp>
+      <p:sp>
+        <p:nvSpPr>
+          <p:cNvPr id="9" name="Rounded Rectangle 8"/>
+          <p:cNvSpPr/>
+          <p:nvPr/>
+        </p:nvSpPr>
+        <p:spPr>
+          <a:xfrm>
+            <a:off x="7040880" y="2560320"/>
+            <a:ext cx="2286000" cy="2011680"/>
+          </a:xfrm>
+          <a:prstGeom prst="roundRect">
+            <a:avLst>
+              <a:gd name="adj" fmla="val 6000"/>
+            </a:avLst>
+          </a:prstGeom>
+          <a:solidFill>
+            <a:srgbClr val="0E8F83"/>
+          </a:solidFill>
+          <a:ln>
+            <a:noFill/>
+          </a:ln>
+          <a:effectLst/>
+        </p:spPr>
+        <p:style>
+          <a:lnRef idx="1">
+            <a:schemeClr val="accent1"/>
+          </a:lnRef>
+          <a:fillRef idx="3">
+            <a:schemeClr val="accent1"/>
+          </a:fillRef>
+          <a:effectRef idx="2">
+            <a:schemeClr val="accent1"/>
+          </a:effectRef>
+          <a:fontRef idx="minor">
+            <a:schemeClr val="lt1"/>
+          </a:fontRef>
+        </p:style>
+        <p:txBody>
+          <a:bodyPr rtlCol="0" anchor="ctr" wrap="square" lIns="137160" tIns="91440" rIns="137160" bIns="91440"/>
+          <a:lstStyle/>
+          <a:p>
+            <a:pPr algn="ctr"/>
+            <a:r>
+              <a:rPr sz="1600" b="1" i="0">
+                <a:solidFill>
+                  <a:srgbClr val="FFFFFF"/>
+                </a:solidFill>
+                <a:latin typeface="Calibri"/>
+              </a:rPr>
+              <a:t>Cognitive Compiler</a:t>
+            </a:r>
+          </a:p>
+          <a:p>
+            <a:pPr algn="ctr">
+              <a:spcBef>
+                <a:spcPts val="600"/>
+              </a:spcBef>
+            </a:pPr>
+            <a:r>
+              <a:rPr sz="1200" b="0" i="0">
+                <a:solidFill>
+                  <a:srgbClr val="DDF1EE"/>
+                </a:solidFill>
+                <a:latin typeface="Calibri"/>
+              </a:rPr>
+              <a:t>rules + local model (GenieX)</a:t>
+            </a:r>
+          </a:p>
+        </p:txBody>
+      </p:sp>
+      <p:sp>
+        <p:nvSpPr>
+          <p:cNvPr id="10" name="Rounded Rectangle 9"/>
+          <p:cNvSpPr/>
+          <p:nvPr/>
+        </p:nvSpPr>
+        <p:spPr>
+          <a:xfrm>
+            <a:off x="9784080" y="3108960"/>
+            <a:ext cx="1828800" cy="914400"/>
+          </a:xfrm>
+          <a:prstGeom prst="roundRect">
+            <a:avLst>
+              <a:gd name="adj" fmla="val 6000"/>
+            </a:avLst>
+          </a:prstGeom>
+          <a:solidFill>
+            <a:srgbClr val="0E8F83"/>
+          </a:solidFill>
+          <a:ln>
+            <a:noFill/>
+          </a:ln>
+          <a:effectLst/>
+        </p:spPr>
+        <p:style>
+          <a:lnRef idx="1">
+            <a:schemeClr val="accent1"/>
+          </a:lnRef>
+          <a:fillRef idx="3">
+            <a:schemeClr val="accent1"/>
+          </a:fillRef>
+          <a:effectRef idx="2">
+            <a:schemeClr val="accent1"/>
+          </a:effectRef>
+          <a:fontRef idx="minor">
+            <a:schemeClr val="lt1"/>
+          </a:fontRef>
+        </p:style>
+        <p:txBody>
+          <a:bodyPr rtlCol="0" anchor="ctr" wrap="square" lIns="137160" tIns="91440" rIns="137160" bIns="91440"/>
+          <a:lstStyle/>
+          <a:p>
+            <a:pPr algn="ctr"/>
+            <a:r>
+              <a:rPr sz="1600" b="1" i="0">
+                <a:solidFill>
+                  <a:srgbClr val="FFFFFF"/>
+                </a:solidFill>
+                <a:latin typeface="Calibri"/>
+              </a:rPr>
+              <a:t>Schema validation</a:t>
+            </a:r>
+          </a:p>
+          <a:p>
+            <a:pPr algn="ctr">
+              <a:spcBef>
+                <a:spcPts val="600"/>
+              </a:spcBef>
+            </a:pPr>
+            <a:r>
+              <a:rPr sz="1200" b="0" i="0">
+                <a:solidFill>
+                  <a:srgbClr val="DDF1EE"/>
+                </a:solidFill>
+                <a:latin typeface="Calibri"/>
+              </a:rPr>
+              <a:t>Pydantic</a:t>
+            </a:r>
+          </a:p>
+        </p:txBody>
+      </p:sp>
+      <p:sp>
+        <p:nvSpPr>
+          <p:cNvPr id="11" name="Rounded Rectangle 10"/>
+          <p:cNvSpPr/>
+          <p:nvPr/>
+        </p:nvSpPr>
+        <p:spPr>
+          <a:xfrm>
+            <a:off x="9784080" y="4572000"/>
+            <a:ext cx="1828800" cy="1005840"/>
+          </a:xfrm>
+          <a:prstGeom prst="roundRect">
+            <a:avLst>
+              <a:gd name="adj" fmla="val 6000"/>
+            </a:avLst>
+          </a:prstGeom>
+          <a:solidFill>
+            <a:srgbClr val="FFFFFF"/>
+          </a:solidFill>
+          <a:ln w="15875">
+            <a:solidFill>
+              <a:srgbClr val="556575"/>
+            </a:solidFill>
+            <a:prstDash val="dash"/>
+          </a:ln>
+          <a:effectLst/>
+        </p:spPr>
+        <p:style>
+          <a:lnRef idx="1">
+            <a:schemeClr val="accent1"/>
+          </a:lnRef>
+          <a:fillRef idx="3">
+            <a:schemeClr val="accent1"/>
+          </a:fillRef>
+          <a:effectRef idx="2">
+            <a:schemeClr val="accent1"/>
+          </a:effectRef>
+          <a:fontRef idx="minor">
+            <a:schemeClr val="lt1"/>
+          </a:fontRef>
+        </p:style>
+        <p:txBody>
+          <a:bodyPr rtlCol="0" anchor="ctr" wrap="square" lIns="137160" tIns="91440" rIns="137160" bIns="91440"/>
+          <a:lstStyle/>
+          <a:p>
+            <a:pPr algn="ctr"/>
+            <a:r>
+              <a:rPr sz="1600" b="1" i="0">
+                <a:solidFill>
+                  <a:srgbClr val="1B2A3A"/>
+                </a:solidFill>
+                <a:latin typeface="Calibri"/>
+              </a:rPr>
+              <a:t>Tasks, Focus, memory, UI</a:t>
+            </a:r>
+          </a:p>
+        </p:txBody>
+      </p:sp>
+      <p:cxnSp>
+        <p:nvCxnSpPr>
+          <p:cNvPr id="12" name="Connector 11"/>
+          <p:cNvCxnSpPr/>
+          <p:nvPr/>
+        </p:nvCxnSpPr>
+        <p:spPr>
+          <a:xfrm>
+            <a:off x="2377440" y="2011680"/>
+            <a:ext cx="365760" cy="0"/>
+          </a:xfrm>
+          <a:prstGeom prst="line">
+            <a:avLst/>
+          </a:prstGeom>
+          <a:ln w="25400">
+            <a:solidFill>
+              <a:srgbClr val="556575"/>
+            </a:solidFill>
+            <a:tailEnd type="triangle"/>
+          </a:ln>
+        </p:spPr>
+        <p:style>
+          <a:lnRef idx="2">
+            <a:schemeClr val="accent1"/>
+          </a:lnRef>
+          <a:fillRef idx="0">
+            <a:schemeClr val="accent1"/>
+          </a:fillRef>
+          <a:effectRef idx="1">
+            <a:schemeClr val="accent1"/>
+          </a:effectRef>
+          <a:fontRef idx="minor">
+            <a:schemeClr val="tx1"/>
+          </a:fontRef>
+        </p:style>
+      </p:cxnSp>
+      <p:cxnSp>
+        <p:nvCxnSpPr>
+          <p:cNvPr id="13" name="Connector 12"/>
+          <p:cNvCxnSpPr/>
+          <p:nvPr/>
+        </p:nvCxnSpPr>
+        <p:spPr>
+          <a:xfrm>
+            <a:off x="4206240" y="2011680"/>
+            <a:ext cx="365760" cy="0"/>
+          </a:xfrm>
+          <a:prstGeom prst="line">
+            <a:avLst/>
+          </a:prstGeom>
+          <a:ln w="25400">
+            <a:solidFill>
+              <a:srgbClr val="556575"/>
+            </a:solidFill>
+            <a:tailEnd type="triangle"/>
+          </a:ln>
+        </p:spPr>
+        <p:style>
+          <a:lnRef idx="2">
+            <a:schemeClr val="accent1"/>
+          </a:lnRef>
+          <a:fillRef idx="0">
+            <a:schemeClr val="accent1"/>
+          </a:fillRef>
+          <a:effectRef idx="1">
+            <a:schemeClr val="accent1"/>
+          </a:effectRef>
+          <a:fontRef idx="minor">
+            <a:schemeClr val="tx1"/>
+          </a:fontRef>
+        </p:style>
+      </p:cxnSp>
+      <p:cxnSp>
+        <p:nvCxnSpPr>
+          <p:cNvPr id="14" name="Connector 13"/>
+          <p:cNvCxnSpPr/>
+          <p:nvPr/>
+        </p:nvCxnSpPr>
+        <p:spPr>
+          <a:xfrm>
+            <a:off x="2377440" y="3474720"/>
+            <a:ext cx="2194560" cy="0"/>
+          </a:xfrm>
+          <a:prstGeom prst="line">
+            <a:avLst/>
+          </a:prstGeom>
+          <a:ln w="25400">
+            <a:solidFill>
+              <a:srgbClr val="556575"/>
+            </a:solidFill>
+            <a:tailEnd type="triangle"/>
+          </a:ln>
+        </p:spPr>
+        <p:style>
+          <a:lnRef idx="2">
+            <a:schemeClr val="accent1"/>
+          </a:lnRef>
+          <a:fillRef idx="0">
+            <a:schemeClr val="accent1"/>
+          </a:fillRef>
+          <a:effectRef idx="1">
+            <a:schemeClr val="accent1"/>
+          </a:effectRef>
+          <a:fontRef idx="minor">
+            <a:schemeClr val="tx1"/>
+          </a:fontRef>
+        </p:style>
+      </p:cxnSp>
+      <p:cxnSp>
+        <p:nvCxnSpPr>
+          <p:cNvPr id="15" name="Connector 14"/>
+          <p:cNvCxnSpPr/>
+          <p:nvPr/>
+        </p:nvCxnSpPr>
+        <p:spPr>
+          <a:xfrm>
+            <a:off x="6400800" y="2011680"/>
+            <a:ext cx="640080" cy="1097280"/>
+          </a:xfrm>
+          <a:prstGeom prst="line">
+            <a:avLst/>
+          </a:prstGeom>
+          <a:ln w="25400">
+            <a:solidFill>
+              <a:srgbClr val="556575"/>
+            </a:solidFill>
+            <a:tailEnd type="triangle"/>
+          </a:ln>
+        </p:spPr>
+        <p:style>
+          <a:lnRef idx="2">
+            <a:schemeClr val="accent1"/>
+          </a:lnRef>
+          <a:fillRef idx="0">
+            <a:schemeClr val="accent1"/>
+          </a:fillRef>
+          <a:effectRef idx="1">
+            <a:schemeClr val="accent1"/>
+          </a:effectRef>
+          <a:fontRef idx="minor">
+            <a:schemeClr val="tx1"/>
+          </a:fontRef>
+        </p:style>
+      </p:cxnSp>
+      <p:cxnSp>
+        <p:nvCxnSpPr>
+          <p:cNvPr id="16" name="Connector 15"/>
+          <p:cNvCxnSpPr/>
+          <p:nvPr/>
+        </p:nvCxnSpPr>
+        <p:spPr>
+          <a:xfrm>
+            <a:off x="6400800" y="3474720"/>
+            <a:ext cx="640080" cy="91440"/>
+          </a:xfrm>
+          <a:prstGeom prst="line">
+            <a:avLst/>
+          </a:prstGeom>
+          <a:ln w="25400">
+            <a:solidFill>
+              <a:srgbClr val="556575"/>
+            </a:solidFill>
+            <a:tailEnd type="triangle"/>
+          </a:ln>
+        </p:spPr>
+        <p:style>
+          <a:lnRef idx="2">
+            <a:schemeClr val="accent1"/>
+          </a:lnRef>
+          <a:fillRef idx="0">
+            <a:schemeClr val="accent1"/>
+          </a:fillRef>
+          <a:effectRef idx="1">
+            <a:schemeClr val="accent1"/>
+          </a:effectRef>
+          <a:fontRef idx="minor">
+            <a:schemeClr val="tx1"/>
+          </a:fontRef>
+        </p:style>
+      </p:cxnSp>
+      <p:cxnSp>
+        <p:nvCxnSpPr>
+          <p:cNvPr id="17" name="Connector 16"/>
+          <p:cNvCxnSpPr/>
+          <p:nvPr/>
+        </p:nvCxnSpPr>
+        <p:spPr>
+          <a:xfrm flipV="1">
+            <a:off x="6400800" y="4114800"/>
+            <a:ext cx="640080" cy="822960"/>
+          </a:xfrm>
+          <a:prstGeom prst="line">
+            <a:avLst/>
+          </a:prstGeom>
+          <a:ln w="25400">
+            <a:solidFill>
+              <a:srgbClr val="556575"/>
+            </a:solidFill>
+            <a:tailEnd type="triangle"/>
+          </a:ln>
+        </p:spPr>
+        <p:style>
+          <a:lnRef idx="2">
+            <a:schemeClr val="accent1"/>
+          </a:lnRef>
+          <a:fillRef idx="0">
+            <a:schemeClr val="accent1"/>
+          </a:fillRef>
+          <a:effectRef idx="1">
+            <a:schemeClr val="accent1"/>
+          </a:effectRef>
+          <a:fontRef idx="minor">
+            <a:schemeClr val="tx1"/>
+          </a:fontRef>
+        </p:style>
+      </p:cxnSp>
+      <p:cxnSp>
+        <p:nvCxnSpPr>
+          <p:cNvPr id="18" name="Connector 17"/>
+          <p:cNvCxnSpPr/>
+          <p:nvPr/>
+        </p:nvCxnSpPr>
+        <p:spPr>
+          <a:xfrm>
+            <a:off x="9326880" y="3566160"/>
+            <a:ext cx="457200" cy="0"/>
+          </a:xfrm>
+          <a:prstGeom prst="line">
+            <a:avLst/>
+          </a:prstGeom>
+          <a:ln w="25400">
+            <a:solidFill>
+              <a:srgbClr val="556575"/>
+            </a:solidFill>
+            <a:tailEnd type="triangle"/>
+          </a:ln>
+        </p:spPr>
+        <p:style>
+          <a:lnRef idx="2">
+            <a:schemeClr val="accent1"/>
+          </a:lnRef>
+          <a:fillRef idx="0">
+            <a:schemeClr val="accent1"/>
+          </a:fillRef>
+          <a:effectRef idx="1">
+            <a:schemeClr val="accent1"/>
+          </a:effectRef>
+          <a:fontRef idx="minor">
+            <a:schemeClr val="tx1"/>
+          </a:fontRef>
+        </p:style>
+      </p:cxnSp>
+      <p:cxnSp>
+        <p:nvCxnSpPr>
+          <p:cNvPr id="19" name="Connector 18"/>
+          <p:cNvCxnSpPr/>
+          <p:nvPr/>
+        </p:nvCxnSpPr>
+        <p:spPr>
+          <a:xfrm>
+            <a:off x="10698480" y="4023360"/>
+            <a:ext cx="0" cy="548640"/>
+          </a:xfrm>
+          <a:prstGeom prst="line">
+            <a:avLst/>
+          </a:prstGeom>
+          <a:ln w="25400">
+            <a:solidFill>
+              <a:srgbClr val="556575"/>
+            </a:solidFill>
+            <a:tailEnd type="triangle"/>
+          </a:ln>
+        </p:spPr>
+        <p:style>
+          <a:lnRef idx="2">
+            <a:schemeClr val="accent1"/>
+          </a:lnRef>
+          <a:fillRef idx="0">
+            <a:schemeClr val="accent1"/>
+          </a:fillRef>
+          <a:effectRef idx="1">
+            <a:schemeClr val="accent1"/>
+          </a:effectRef>
+          <a:fontRef idx="minor">
+            <a:schemeClr val="tx1"/>
+          </a:fontRef>
+        </p:style>
+      </p:cxnSp>
+      <p:sp>
+        <p:nvSpPr>
+          <p:cNvPr id="20" name="Rectangle 19"/>
+          <p:cNvSpPr/>
+          <p:nvPr/>
+        </p:nvSpPr>
+        <p:spPr>
+          <a:xfrm>
+            <a:off x="640080" y="5989320"/>
+            <a:ext cx="274320" cy="274320"/>
+          </a:xfrm>
+          <a:prstGeom prst="rect">
+            <a:avLst/>
+          </a:prstGeom>
+          <a:solidFill>
+            <a:srgbClr val="0E8F83"/>
+          </a:solidFill>
+          <a:ln>
+            <a:noFill/>
+          </a:ln>
+          <a:effectLst/>
+        </p:spPr>
+        <p:style>
+          <a:lnRef idx="1">
+            <a:schemeClr val="accent1"/>
+          </a:lnRef>
+          <a:fillRef idx="3">
+            <a:schemeClr val="accent1"/>
+          </a:fillRef>
+          <a:effectRef idx="2">
+            <a:schemeClr val="accent1"/>
+          </a:effectRef>
+          <a:fontRef idx="minor">
+            <a:schemeClr val="lt1"/>
+          </a:fontRef>
+        </p:style>
+        <p:txBody>
+          <a:bodyPr rtlCol="0" anchor="ctr"/>
+          <a:lstStyle/>
+          <a:p>
+            <a:pPr algn="ctr"/>
+          </a:p>
+        </p:txBody>
+      </p:sp>
+      <p:sp>
+        <p:nvSpPr>
+          <p:cNvPr id="21" name="TextBox 20"/>
           <p:cNvSpPr txBox="1"/>
           <p:nvPr/>
         </p:nvSpPr>
         <p:spPr>
           <a:xfrm>
-            <a:off x="731520" y="1828800"/>
-            <a:ext cx="10698480" cy="4389120"/>
+            <a:off x="1005840" y="5943600"/>
+            <a:ext cx="3291840" cy="365760"/>
           </a:xfrm>
           <a:prstGeom prst="rect">
             <a:avLst/>
@@ -4167,112 +6908,137 @@
           <a:noFill/>
         </p:spPr>
         <p:txBody>
-          <a:bodyPr wrap="square">
+          <a:bodyPr wrap="square" anchor="ctr" lIns="0" tIns="0" rIns="0" bIns="0">
             <a:spAutoFit/>
           </a:bodyPr>
           <a:lstStyle/>
           <a:p>
-            <a:pPr>
-              <a:defRPr sz="1700" b="1">
-                <a:solidFill>
-                  <a:srgbClr val="101828"/>
-                </a:solidFill>
-              </a:defRPr>
-            </a:pPr>
-            <a:r>
-              <a:t>AI inference is offloaded to the Hexagon NPU; application logic &amp; database reside on the CPU.</a:t>
-            </a:r>
-          </a:p>
-          <a:p>
-            <a:pPr>
-              <a:spcBef>
-                <a:spcPts val="1000"/>
-              </a:spcBef>
-              <a:defRPr b="1" sz="1500">
-                <a:solidFill>
-                  <a:srgbClr val="E02020"/>
-                </a:solidFill>
-              </a:defRPr>
-            </a:pPr>
-            <a:r>
-              <a:t>• Speech (ASR): </a:t>
-            </a:r>
-            <a:r>
-              <a:rPr b="0">
-                <a:solidFill>
-                  <a:srgbClr val="475467"/>
-                </a:solidFill>
-              </a:rPr>
-              <a:t>Whisper-Base — Qualcomm AI Hub verified for Snapdragon X Elite / X Plus; fast local speech-to-text without cloud streaming.</a:t>
-            </a:r>
-          </a:p>
-          <a:p>
-            <a:pPr>
-              <a:spcBef>
-                <a:spcPts val="1000"/>
-              </a:spcBef>
-              <a:defRPr b="1" sz="1500">
-                <a:solidFill>
-                  <a:srgbClr val="E02020"/>
-                </a:solidFill>
-              </a:defRPr>
-            </a:pPr>
-            <a:r>
-              <a:t>• Reasoning (Cognitive Compiler): </a:t>
-            </a:r>
-            <a:r>
-              <a:rPr b="0">
-                <a:solidFill>
-                  <a:srgbClr val="475467"/>
-                </a:solidFill>
-              </a:rPr>
-              <a:t>Qwen3-0.6B / Phi-4-Mini — Local GenieX / QAIRT execution on Hexagon NPU; sub-second JSON compilation (~28 tokens/s).</a:t>
-            </a:r>
-          </a:p>
-          <a:p>
-            <a:pPr>
-              <a:spcBef>
-                <a:spcPts val="1000"/>
-              </a:spcBef>
-              <a:defRPr b="1" sz="1500">
-                <a:solidFill>
-                  <a:srgbClr val="E02020"/>
-                </a:solidFill>
-              </a:defRPr>
-            </a:pPr>
-            <a:r>
-              <a:t>• Vision (ContextLens): </a:t>
-            </a:r>
-            <a:r>
-              <a:rPr b="0">
-                <a:solidFill>
-                  <a:srgbClr val="475467"/>
-                </a:solidFill>
-              </a:rPr>
-              <a:t>Qwen3-VL-4B-Instruct — On-device visual understanding of slides, charts, and screen context via GenieX.</a:t>
-            </a:r>
-          </a:p>
-          <a:p>
-            <a:pPr>
-              <a:spcBef>
-                <a:spcPts val="1000"/>
-              </a:spcBef>
-              <a:defRPr b="1" sz="1500">
-                <a:solidFill>
-                  <a:srgbClr val="E02020"/>
-                </a:solidFill>
-              </a:defRPr>
-            </a:pPr>
-            <a:r>
-              <a:t>• Local API Bridge: </a:t>
-            </a:r>
-            <a:r>
-              <a:rPr b="0">
-                <a:solidFill>
-                  <a:srgbClr val="475467"/>
-                </a:solidFill>
-              </a:rPr>
-              <a:t>GenieX OpenAI-compatible local server (http://127.0.0.1:18181/v1) — No cloud network requests required.</a:t>
+            <a:pPr algn="l"/>
+            <a:r>
+              <a:rPr sz="1300" b="0" i="0">
+                <a:solidFill>
+                  <a:srgbClr val="1B2A3A"/>
+                </a:solidFill>
+                <a:latin typeface="Calibri"/>
+              </a:rPr>
+              <a:t>Implemented and tested on CPU</a:t>
+            </a:r>
+          </a:p>
+        </p:txBody>
+      </p:sp>
+      <p:sp>
+        <p:nvSpPr>
+          <p:cNvPr id="22" name="Rectangle 21"/>
+          <p:cNvSpPr/>
+          <p:nvPr/>
+        </p:nvSpPr>
+        <p:spPr>
+          <a:xfrm>
+            <a:off x="4389120" y="5989320"/>
+            <a:ext cx="274320" cy="274320"/>
+          </a:xfrm>
+          <a:prstGeom prst="rect">
+            <a:avLst/>
+          </a:prstGeom>
+          <a:solidFill>
+            <a:srgbClr val="FFFFFF"/>
+          </a:solidFill>
+          <a:ln w="15875">
+            <a:solidFill>
+              <a:srgbClr val="556575"/>
+            </a:solidFill>
+            <a:prstDash val="dash"/>
+          </a:ln>
+          <a:effectLst/>
+        </p:spPr>
+        <p:style>
+          <a:lnRef idx="1">
+            <a:schemeClr val="accent1"/>
+          </a:lnRef>
+          <a:fillRef idx="3">
+            <a:schemeClr val="accent1"/>
+          </a:fillRef>
+          <a:effectRef idx="2">
+            <a:schemeClr val="accent1"/>
+          </a:effectRef>
+          <a:fontRef idx="minor">
+            <a:schemeClr val="lt1"/>
+          </a:fontRef>
+        </p:style>
+        <p:txBody>
+          <a:bodyPr rtlCol="0" anchor="ctr"/>
+          <a:lstStyle/>
+          <a:p>
+            <a:pPr algn="ctr"/>
+          </a:p>
+        </p:txBody>
+      </p:sp>
+      <p:sp>
+        <p:nvSpPr>
+          <p:cNvPr id="23" name="TextBox 22"/>
+          <p:cNvSpPr txBox="1"/>
+          <p:nvPr/>
+        </p:nvSpPr>
+        <p:spPr>
+          <a:xfrm>
+            <a:off x="4754880" y="5943600"/>
+            <a:ext cx="1828800" cy="365760"/>
+          </a:xfrm>
+          <a:prstGeom prst="rect">
+            <a:avLst/>
+          </a:prstGeom>
+          <a:noFill/>
+        </p:spPr>
+        <p:txBody>
+          <a:bodyPr wrap="square" anchor="ctr" lIns="0" tIns="0" rIns="0" bIns="0">
+            <a:spAutoFit/>
+          </a:bodyPr>
+          <a:lstStyle/>
+          <a:p>
+            <a:pPr algn="l"/>
+            <a:r>
+              <a:rPr sz="1300" b="0" i="0">
+                <a:solidFill>
+                  <a:srgbClr val="1B2A3A"/>
+                </a:solidFill>
+                <a:latin typeface="Calibri"/>
+              </a:rPr>
+              <a:t>Planned</a:t>
+            </a:r>
+          </a:p>
+        </p:txBody>
+      </p:sp>
+      <p:sp>
+        <p:nvSpPr>
+          <p:cNvPr id="24" name="TextBox 23"/>
+          <p:cNvSpPr txBox="1"/>
+          <p:nvPr/>
+        </p:nvSpPr>
+        <p:spPr>
+          <a:xfrm>
+            <a:off x="6400800" y="5943600"/>
+            <a:ext cx="5212080" cy="365760"/>
+          </a:xfrm>
+          <a:prstGeom prst="rect">
+            <a:avLst/>
+          </a:prstGeom>
+          <a:noFill/>
+        </p:spPr>
+        <p:txBody>
+          <a:bodyPr wrap="square" anchor="ctr" lIns="0" tIns="0" rIns="0" bIns="0">
+            <a:spAutoFit/>
+          </a:bodyPr>
+          <a:lstStyle/>
+          <a:p>
+            <a:pPr algn="l"/>
+            <a:r>
+              <a:rPr sz="1300" b="0" i="1">
+                <a:solidFill>
+                  <a:srgbClr val="556575"/>
+                </a:solidFill>
+                <a:latin typeface="Calibri"/>
+              </a:rPr>
+              <a:t>Model path written; not yet run on my Snapdragon device</a:t>
             </a:r>
           </a:p>
         </p:txBody>
@@ -4291,7 +7057,7 @@
     <p:bg>
       <p:bgPr>
         <a:solidFill>
-          <a:srgbClr val="F8FAFC"/>
+          <a:srgbClr val="F5F7FA"/>
         </a:solidFill>
         <a:effectLst/>
       </p:bgPr>
@@ -4311,8 +7077,8 @@
         </p:nvSpPr>
         <p:spPr>
           <a:xfrm>
-            <a:off x="731520" y="457200"/>
-            <a:ext cx="10698480" cy="1097280"/>
+            <a:off x="640080" y="457200"/>
+            <a:ext cx="10881360" cy="822960"/>
           </a:xfrm>
           <a:prstGeom prst="rect">
             <a:avLst/>
@@ -4320,148 +7086,474 @@
           <a:noFill/>
         </p:spPr>
         <p:txBody>
-          <a:bodyPr wrap="square" lIns="0" tIns="0" rIns="0" bIns="0">
+          <a:bodyPr wrap="square" anchor="ctr" lIns="0" tIns="0" rIns="0" bIns="0">
             <a:spAutoFit/>
           </a:bodyPr>
           <a:lstStyle/>
           <a:p>
-            <a:pPr>
-              <a:defRPr sz="1100" b="1">
-                <a:solidFill>
-                  <a:srgbClr val="E02020"/>
-                </a:solidFill>
-              </a:defRPr>
-            </a:pPr>
-            <a:r>
-              <a:t>NEUROLENS | SNAPDRAGON AI LAB 2026</a:t>
-            </a:r>
-          </a:p>
-          <a:p>
-            <a:pPr>
-              <a:defRPr sz="2800" b="1">
-                <a:solidFill>
-                  <a:srgbClr val="101828"/>
-                </a:solidFill>
-              </a:defRPr>
-            </a:pPr>
-            <a:r>
-              <a:t>Privacy by Design: Ephemeral by Default</a:t>
-            </a:r>
-          </a:p>
-        </p:txBody>
-      </p:sp>
-      <p:sp>
-        <p:nvSpPr>
-          <p:cNvPr id="3" name="TextBox 2"/>
-          <p:cNvSpPr txBox="1"/>
+            <a:pPr algn="l"/>
+            <a:r>
+              <a:rPr sz="3400" b="1" i="0">
+                <a:solidFill>
+                  <a:srgbClr val="0B1F33"/>
+                </a:solidFill>
+                <a:latin typeface="Cambria"/>
+              </a:rPr>
+              <a:t>Snapdragon plan: targets, not results</a:t>
+            </a:r>
+          </a:p>
+        </p:txBody>
+      </p:sp>
+      <p:graphicFrame>
+        <p:nvGraphicFramePr>
+          <p:cNvPr id="3" name="Table 2"/>
+          <p:cNvGraphicFramePr>
+            <a:graphicFrameLocks noGrp="1"/>
+          </p:cNvGraphicFramePr>
           <p:nvPr/>
-        </p:nvSpPr>
-        <p:spPr>
-          <a:xfrm>
-            <a:off x="731520" y="1828800"/>
-            <a:ext cx="10698480" cy="4389120"/>
-          </a:xfrm>
-          <a:prstGeom prst="rect">
-            <a:avLst/>
+        </p:nvGraphicFramePr>
+        <p:xfrm>
+          <a:off x="640080" y="1737360"/>
+          <a:ext cx="10881360" cy="2743200"/>
+        </p:xfrm>
+        <a:graphic>
+          <a:graphicData uri="http://schemas.openxmlformats.org/drawingml/2006/table">
+            <a:tbl>
+              <a:tblPr firstRow="1" bandRow="1">
+                <a:tableStyleId>{5C22544A-7EE6-4342-B048-85BDC9FD1C3A}</a:tableStyleId>
+              </a:tblPr>
+              <a:tblGrid>
+                <a:gridCol w="2377440"/>
+                <a:gridCol w="2926080"/>
+                <a:gridCol w="3108960"/>
+                <a:gridCol w="2468880"/>
+              </a:tblGrid>
+              <a:tr h="685800">
+                <a:tc>
+                  <a:txBody>
+                    <a:bodyPr wrap="square" lIns="137160" rIns="137160"/>
+                    <a:lstStyle/>
+                    <a:p>
+                      <a:r>
+                        <a:rPr sz="1600" b="1">
+                          <a:solidFill>
+                            <a:srgbClr val="FFFFFF"/>
+                          </a:solidFill>
+                          <a:latin typeface="Calibri"/>
+                        </a:rPr>
+                        <a:t>Role</a:t>
+                      </a:r>
+                    </a:p>
+                  </a:txBody>
+                  <a:tcPr anchor="ctr">
+                    <a:solidFill>
+                      <a:srgbClr val="0B1F33"/>
+                    </a:solidFill>
+                  </a:tcPr>
+                </a:tc>
+                <a:tc>
+                  <a:txBody>
+                    <a:bodyPr wrap="square" lIns="137160" rIns="137160"/>
+                    <a:lstStyle/>
+                    <a:p>
+                      <a:r>
+                        <a:rPr sz="1600" b="1">
+                          <a:solidFill>
+                            <a:srgbClr val="FFFFFF"/>
+                          </a:solidFill>
+                          <a:latin typeface="Calibri"/>
+                        </a:rPr>
+                        <a:t>Candidate model</a:t>
+                      </a:r>
+                    </a:p>
+                  </a:txBody>
+                  <a:tcPr anchor="ctr">
+                    <a:solidFill>
+                      <a:srgbClr val="0B1F33"/>
+                    </a:solidFill>
+                  </a:tcPr>
+                </a:tc>
+                <a:tc>
+                  <a:txBody>
+                    <a:bodyPr wrap="square" lIns="137160" rIns="137160"/>
+                    <a:lstStyle/>
+                    <a:p>
+                      <a:r>
+                        <a:rPr sz="1600" b="1">
+                          <a:solidFill>
+                            <a:srgbClr val="FFFFFF"/>
+                          </a:solidFill>
+                          <a:latin typeface="Calibri"/>
+                        </a:rPr>
+                        <a:t>Intended runtime</a:t>
+                      </a:r>
+                    </a:p>
+                  </a:txBody>
+                  <a:tcPr anchor="ctr">
+                    <a:solidFill>
+                      <a:srgbClr val="0B1F33"/>
+                    </a:solidFill>
+                  </a:tcPr>
+                </a:tc>
+                <a:tc>
+                  <a:txBody>
+                    <a:bodyPr wrap="square" lIns="137160" rIns="137160"/>
+                    <a:lstStyle/>
+                    <a:p>
+                      <a:r>
+                        <a:rPr sz="1600" b="1">
+                          <a:solidFill>
+                            <a:srgbClr val="FFFFFF"/>
+                          </a:solidFill>
+                          <a:latin typeface="Calibri"/>
+                        </a:rPr>
+                        <a:t>Status</a:t>
+                      </a:r>
+                    </a:p>
+                  </a:txBody>
+                  <a:tcPr anchor="ctr">
+                    <a:solidFill>
+                      <a:srgbClr val="0B1F33"/>
+                    </a:solidFill>
+                  </a:tcPr>
+                </a:tc>
+              </a:tr>
+              <a:tr h="685800">
+                <a:tc>
+                  <a:txBody>
+                    <a:bodyPr wrap="square" lIns="137160" rIns="137160"/>
+                    <a:lstStyle/>
+                    <a:p>
+                      <a:r>
+                        <a:rPr sz="1600" b="1">
+                          <a:solidFill>
+                            <a:srgbClr val="1B2A3A"/>
+                          </a:solidFill>
+                          <a:latin typeface="Calibri"/>
+                        </a:rPr>
+                        <a:t>Speech to text</a:t>
+                      </a:r>
+                    </a:p>
+                  </a:txBody>
+                  <a:tcPr anchor="ctr">
+                    <a:solidFill>
+                      <a:srgbClr val="FFFFFF"/>
+                    </a:solidFill>
+                  </a:tcPr>
+                </a:tc>
+                <a:tc>
+                  <a:txBody>
+                    <a:bodyPr wrap="square" lIns="137160" rIns="137160"/>
+                    <a:lstStyle/>
+                    <a:p>
+                      <a:r>
+                        <a:rPr sz="1600" b="0">
+                          <a:solidFill>
+                            <a:srgbClr val="1B2A3A"/>
+                          </a:solidFill>
+                          <a:latin typeface="Calibri"/>
+                        </a:rPr>
+                        <a:t>Whisper-Base</a:t>
+                      </a:r>
+                    </a:p>
+                  </a:txBody>
+                  <a:tcPr anchor="ctr">
+                    <a:solidFill>
+                      <a:srgbClr val="FFFFFF"/>
+                    </a:solidFill>
+                  </a:tcPr>
+                </a:tc>
+                <a:tc>
+                  <a:txBody>
+                    <a:bodyPr wrap="square" lIns="137160" rIns="137160"/>
+                    <a:lstStyle/>
+                    <a:p>
+                      <a:r>
+                        <a:rPr sz="1600" b="0">
+                          <a:solidFill>
+                            <a:srgbClr val="1B2A3A"/>
+                          </a:solidFill>
+                          <a:latin typeface="Calibri"/>
+                        </a:rPr>
+                        <a:t>Qualcomm AI Hub / QAI AppBuilder</a:t>
+                      </a:r>
+                    </a:p>
+                  </a:txBody>
+                  <a:tcPr anchor="ctr">
+                    <a:solidFill>
+                      <a:srgbClr val="FFFFFF"/>
+                    </a:solidFill>
+                  </a:tcPr>
+                </a:tc>
+                <a:tc>
+                  <a:txBody>
+                    <a:bodyPr wrap="square" lIns="137160" rIns="137160"/>
+                    <a:lstStyle/>
+                    <a:p>
+                      <a:r>
+                        <a:rPr sz="1600" b="0">
+                          <a:solidFill>
+                            <a:srgbClr val="1B2A3A"/>
+                          </a:solidFill>
+                          <a:latin typeface="Calibri"/>
+                        </a:rPr>
+                        <a:t>Not yet run on my device</a:t>
+                      </a:r>
+                    </a:p>
+                  </a:txBody>
+                  <a:tcPr anchor="ctr">
+                    <a:solidFill>
+                      <a:srgbClr val="FFFFFF"/>
+                    </a:solidFill>
+                  </a:tcPr>
+                </a:tc>
+              </a:tr>
+              <a:tr h="685800">
+                <a:tc>
+                  <a:txBody>
+                    <a:bodyPr wrap="square" lIns="137160" rIns="137160"/>
+                    <a:lstStyle/>
+                    <a:p>
+                      <a:r>
+                        <a:rPr sz="1600" b="1">
+                          <a:solidFill>
+                            <a:srgbClr val="1B2A3A"/>
+                          </a:solidFill>
+                          <a:latin typeface="Calibri"/>
+                        </a:rPr>
+                        <a:t>Reasoning</a:t>
+                      </a:r>
+                    </a:p>
+                  </a:txBody>
+                  <a:tcPr anchor="ctr">
+                    <a:solidFill>
+                      <a:srgbClr val="DDF1EE"/>
+                    </a:solidFill>
+                  </a:tcPr>
+                </a:tc>
+                <a:tc>
+                  <a:txBody>
+                    <a:bodyPr wrap="square" lIns="137160" rIns="137160"/>
+                    <a:lstStyle/>
+                    <a:p>
+                      <a:r>
+                        <a:rPr sz="1600" b="0">
+                          <a:solidFill>
+                            <a:srgbClr val="1B2A3A"/>
+                          </a:solidFill>
+                          <a:latin typeface="Calibri"/>
+                        </a:rPr>
+                        <a:t>Qwen3-0.6B (Phi-4-Mini alt.)</a:t>
+                      </a:r>
+                    </a:p>
+                  </a:txBody>
+                  <a:tcPr anchor="ctr">
+                    <a:solidFill>
+                      <a:srgbClr val="DDF1EE"/>
+                    </a:solidFill>
+                  </a:tcPr>
+                </a:tc>
+                <a:tc>
+                  <a:txBody>
+                    <a:bodyPr wrap="square" lIns="137160" rIns="137160"/>
+                    <a:lstStyle/>
+                    <a:p>
+                      <a:r>
+                        <a:rPr sz="1600" b="0">
+                          <a:solidFill>
+                            <a:srgbClr val="1B2A3A"/>
+                          </a:solidFill>
+                          <a:latin typeface="Calibri"/>
+                        </a:rPr>
+                        <a:t>GenieX local server</a:t>
+                      </a:r>
+                    </a:p>
+                  </a:txBody>
+                  <a:tcPr anchor="ctr">
+                    <a:solidFill>
+                      <a:srgbClr val="DDF1EE"/>
+                    </a:solidFill>
+                  </a:tcPr>
+                </a:tc>
+                <a:tc>
+                  <a:txBody>
+                    <a:bodyPr wrap="square" lIns="137160" rIns="137160"/>
+                    <a:lstStyle/>
+                    <a:p>
+                      <a:r>
+                        <a:rPr sz="1600" b="0">
+                          <a:solidFill>
+                            <a:srgbClr val="1B2A3A"/>
+                          </a:solidFill>
+                          <a:latin typeface="Calibri"/>
+                        </a:rPr>
+                        <a:t>Client written; not yet run</a:t>
+                      </a:r>
+                    </a:p>
+                  </a:txBody>
+                  <a:tcPr anchor="ctr">
+                    <a:solidFill>
+                      <a:srgbClr val="DDF1EE"/>
+                    </a:solidFill>
+                  </a:tcPr>
+                </a:tc>
+              </a:tr>
+              <a:tr h="685800">
+                <a:tc>
+                  <a:txBody>
+                    <a:bodyPr wrap="square" lIns="137160" rIns="137160"/>
+                    <a:lstStyle/>
+                    <a:p>
+                      <a:r>
+                        <a:rPr sz="1600" b="1">
+                          <a:solidFill>
+                            <a:srgbClr val="1B2A3A"/>
+                          </a:solidFill>
+                          <a:latin typeface="Calibri"/>
+                        </a:rPr>
+                        <a:t>Screen understanding</a:t>
+                      </a:r>
+                    </a:p>
+                  </a:txBody>
+                  <a:tcPr anchor="ctr">
+                    <a:solidFill>
+                      <a:srgbClr val="FFFFFF"/>
+                    </a:solidFill>
+                  </a:tcPr>
+                </a:tc>
+                <a:tc>
+                  <a:txBody>
+                    <a:bodyPr wrap="square" lIns="137160" rIns="137160"/>
+                    <a:lstStyle/>
+                    <a:p>
+                      <a:r>
+                        <a:rPr sz="1600" b="0">
+                          <a:solidFill>
+                            <a:srgbClr val="1B2A3A"/>
+                          </a:solidFill>
+                          <a:latin typeface="Calibri"/>
+                        </a:rPr>
+                        <a:t>Qwen3-VL-4B-Instruct</a:t>
+                      </a:r>
+                    </a:p>
+                  </a:txBody>
+                  <a:tcPr anchor="ctr">
+                    <a:solidFill>
+                      <a:srgbClr val="FFFFFF"/>
+                    </a:solidFill>
+                  </a:tcPr>
+                </a:tc>
+                <a:tc>
+                  <a:txBody>
+                    <a:bodyPr wrap="square" lIns="137160" rIns="137160"/>
+                    <a:lstStyle/>
+                    <a:p>
+                      <a:r>
+                        <a:rPr sz="1600" b="0">
+                          <a:solidFill>
+                            <a:srgbClr val="1B2A3A"/>
+                          </a:solidFill>
+                          <a:latin typeface="Calibri"/>
+                        </a:rPr>
+                        <a:t>GenieX</a:t>
+                      </a:r>
+                    </a:p>
+                  </a:txBody>
+                  <a:tcPr anchor="ctr">
+                    <a:solidFill>
+                      <a:srgbClr val="FFFFFF"/>
+                    </a:solidFill>
+                  </a:tcPr>
+                </a:tc>
+                <a:tc>
+                  <a:txBody>
+                    <a:bodyPr wrap="square" lIns="137160" rIns="137160"/>
+                    <a:lstStyle/>
+                    <a:p>
+                      <a:r>
+                        <a:rPr sz="1600" b="0">
+                          <a:solidFill>
+                            <a:srgbClr val="1B2A3A"/>
+                          </a:solidFill>
+                          <a:latin typeface="Calibri"/>
+                        </a:rPr>
+                        <a:t>Planned</a:t>
+                      </a:r>
+                    </a:p>
+                  </a:txBody>
+                  <a:tcPr anchor="ctr">
+                    <a:solidFill>
+                      <a:srgbClr val="FFFFFF"/>
+                    </a:solidFill>
+                  </a:tcPr>
+                </a:tc>
+              </a:tr>
+            </a:tbl>
+          </a:graphicData>
+        </a:graphic>
+      </p:graphicFrame>
+      <p:sp>
+        <p:nvSpPr>
+          <p:cNvPr id="4" name="Rounded Rectangle 3"/>
+          <p:cNvSpPr/>
+          <p:nvPr/>
+        </p:nvSpPr>
+        <p:spPr>
+          <a:xfrm>
+            <a:off x="640080" y="4892040"/>
+            <a:ext cx="10881360" cy="1097280"/>
+          </a:xfrm>
+          <a:prstGeom prst="roundRect">
+            <a:avLst>
+              <a:gd name="adj" fmla="val 6000"/>
+            </a:avLst>
           </a:prstGeom>
-          <a:noFill/>
-        </p:spPr>
-        <p:txBody>
-          <a:bodyPr wrap="square">
-            <a:spAutoFit/>
-          </a:bodyPr>
-          <a:lstStyle/>
-          <a:p/>
-          <a:p>
-            <a:pPr>
-              <a:spcBef>
-                <a:spcPts val="1200"/>
-              </a:spcBef>
-              <a:defRPr b="1" sz="1600">
-                <a:solidFill>
-                  <a:srgbClr val="101828"/>
-                </a:solidFill>
-              </a:defRPr>
-            </a:pPr>
-            <a:r>
-              <a:t>✔ Ephemeral Speech &amp; Context: </a:t>
-            </a:r>
-            <a:r>
-              <a:rPr b="0">
-                <a:solidFill>
-                  <a:srgbClr val="475467"/>
-                </a:solidFill>
-              </a:rPr>
-              <a:t>Raw audio chunks are processed in RAM and immediately discarded. Never permanently logged without explicit user consent.</a:t>
-            </a:r>
-          </a:p>
-          <a:p>
-            <a:pPr>
-              <a:spcBef>
-                <a:spcPts val="1200"/>
-              </a:spcBef>
-              <a:defRPr b="1" sz="1600">
-                <a:solidFill>
-                  <a:srgbClr val="101828"/>
-                </a:solidFill>
-              </a:defRPr>
-            </a:pPr>
-            <a:r>
-              <a:t>✔ Network Independence (Offline Lock): </a:t>
-            </a:r>
-            <a:r>
-              <a:rPr b="0">
-                <a:solidFill>
-                  <a:srgbClr val="475467"/>
-                </a:solidFill>
-              </a:rPr>
-              <a:t>Full AI processing verified with network disconnected. Zero outbound telemetry or cloud API calls.</a:t>
-            </a:r>
-          </a:p>
-          <a:p>
-            <a:pPr>
-              <a:spcBef>
-                <a:spcPts val="1200"/>
-              </a:spcBef>
-              <a:defRPr b="1" sz="1600">
-                <a:solidFill>
-                  <a:srgbClr val="101828"/>
-                </a:solidFill>
-              </a:defRPr>
-            </a:pPr>
-            <a:r>
-              <a:t>✔ Granular Local Memory: </a:t>
-            </a:r>
-            <a:r>
-              <a:rPr b="0">
-                <a:solidFill>
-                  <a:srgbClr val="475467"/>
-                </a:solidFill>
-              </a:rPr>
-              <a:t>Stores user communication preferences ('prefers concise replies', 'break tasks into small steps') locally in SQLite rather than profiling raw transcripts.</a:t>
-            </a:r>
-          </a:p>
-          <a:p>
-            <a:pPr>
-              <a:spcBef>
-                <a:spcPts val="1200"/>
-              </a:spcBef>
-              <a:defRPr b="1" sz="1600">
-                <a:solidFill>
-                  <a:srgbClr val="101828"/>
-                </a:solidFill>
-              </a:defRPr>
-            </a:pPr>
-            <a:r>
-              <a:t>✔ One-Click Data Purge: </a:t>
-            </a:r>
-            <a:r>
-              <a:rPr b="0">
-                <a:solidFill>
-                  <a:srgbClr val="475467"/>
-                </a:solidFill>
-              </a:rPr>
-              <a:t>Guaranteed local data destruction with immediate database deletion.</a:t>
+          <a:solidFill>
+            <a:srgbClr val="FFFFFF"/>
+          </a:solidFill>
+          <a:ln w="15875">
+            <a:solidFill>
+              <a:srgbClr val="B8C4D0"/>
+            </a:solidFill>
+          </a:ln>
+          <a:effectLst/>
+        </p:spPr>
+        <p:style>
+          <a:lnRef idx="1">
+            <a:schemeClr val="accent1"/>
+          </a:lnRef>
+          <a:fillRef idx="3">
+            <a:schemeClr val="accent1"/>
+          </a:fillRef>
+          <a:effectRef idx="2">
+            <a:schemeClr val="accent1"/>
+          </a:effectRef>
+          <a:fontRef idx="minor">
+            <a:schemeClr val="lt1"/>
+          </a:fontRef>
+        </p:style>
+        <p:txBody>
+          <a:bodyPr rtlCol="0" anchor="ctr" wrap="square" lIns="320040" tIns="91440" rIns="320040" bIns="91440"/>
+          <a:lstStyle/>
+          <a:p>
+            <a:pPr algn="l"/>
+            <a:r>
+              <a:rPr sz="1600" b="0" i="0">
+                <a:solidFill>
+                  <a:srgbClr val="1B2A3A"/>
+                </a:solidFill>
+                <a:latin typeface="Calibri"/>
+              </a:rPr>
+              <a:t>Inference is intended to run on the Snapdragon NPU where supported; UI, storage and rules run on the CPU. </a:t>
+            </a:r>
+            <a:r>
+              <a:rPr sz="1600" b="1" i="0">
+                <a:solidFill>
+                  <a:srgbClr val="0B1F33"/>
+                </a:solidFill>
+                <a:latin typeface="Calibri"/>
+              </a:rPr>
+              <a:t>No speed or accuracy numbers are claimed until measured on my own laptop.</a:t>
             </a:r>
           </a:p>
         </p:txBody>
@@ -4480,7 +7572,7 @@
     <p:bg>
       <p:bgPr>
         <a:solidFill>
-          <a:srgbClr val="F8FAFC"/>
+          <a:srgbClr val="F5F7FA"/>
         </a:solidFill>
         <a:effectLst/>
       </p:bgPr>
@@ -4500,8 +7592,8 @@
         </p:nvSpPr>
         <p:spPr>
           <a:xfrm>
-            <a:off x="731520" y="457200"/>
-            <a:ext cx="10698480" cy="1097280"/>
+            <a:off x="640080" y="457200"/>
+            <a:ext cx="10881360" cy="822960"/>
           </a:xfrm>
           <a:prstGeom prst="rect">
             <a:avLst/>
@@ -4509,46 +7601,135 @@
           <a:noFill/>
         </p:spPr>
         <p:txBody>
-          <a:bodyPr wrap="square" lIns="0" tIns="0" rIns="0" bIns="0">
+          <a:bodyPr wrap="square" anchor="ctr" lIns="0" tIns="0" rIns="0" bIns="0">
             <a:spAutoFit/>
           </a:bodyPr>
           <a:lstStyle/>
           <a:p>
-            <a:pPr>
-              <a:defRPr sz="1100" b="1">
-                <a:solidFill>
-                  <a:srgbClr val="E02020"/>
-                </a:solidFill>
-              </a:defRPr>
-            </a:pPr>
-            <a:r>
-              <a:t>NEUROLENS | SNAPDRAGON AI LAB 2026</a:t>
-            </a:r>
-          </a:p>
-          <a:p>
-            <a:pPr>
-              <a:defRPr sz="2800" b="1">
-                <a:solidFill>
-                  <a:srgbClr val="101828"/>
-                </a:solidFill>
-              </a:defRPr>
-            </a:pPr>
-            <a:r>
-              <a:t>Live Prototype Demonstration</a:t>
-            </a:r>
-          </a:p>
-        </p:txBody>
-      </p:sp>
-      <p:sp>
-        <p:nvSpPr>
-          <p:cNvPr id="3" name="TextBox 2"/>
+            <a:pPr algn="l"/>
+            <a:r>
+              <a:rPr sz="3400" b="1" i="0">
+                <a:solidFill>
+                  <a:srgbClr val="0B1F33"/>
+                </a:solidFill>
+                <a:latin typeface="Cambria"/>
+              </a:rPr>
+              <a:t>Privacy by design (goals for the full app)</a:t>
+            </a:r>
+          </a:p>
+        </p:txBody>
+      </p:sp>
+      <p:sp>
+        <p:nvSpPr>
+          <p:cNvPr id="3" name="Rounded Rectangle 2"/>
+          <p:cNvSpPr/>
+          <p:nvPr/>
+        </p:nvSpPr>
+        <p:spPr>
+          <a:xfrm>
+            <a:off x="640080" y="1737360"/>
+            <a:ext cx="10881360" cy="1188720"/>
+          </a:xfrm>
+          <a:prstGeom prst="roundRect">
+            <a:avLst>
+              <a:gd name="adj" fmla="val 6000"/>
+            </a:avLst>
+          </a:prstGeom>
+          <a:solidFill>
+            <a:srgbClr val="FFFFFF"/>
+          </a:solidFill>
+          <a:ln w="15875">
+            <a:solidFill>
+              <a:srgbClr val="B8C4D0"/>
+            </a:solidFill>
+          </a:ln>
+          <a:effectLst/>
+        </p:spPr>
+        <p:style>
+          <a:lnRef idx="1">
+            <a:schemeClr val="accent1"/>
+          </a:lnRef>
+          <a:fillRef idx="3">
+            <a:schemeClr val="accent1"/>
+          </a:fillRef>
+          <a:effectRef idx="2">
+            <a:schemeClr val="accent1"/>
+          </a:effectRef>
+          <a:fontRef idx="minor">
+            <a:schemeClr val="lt1"/>
+          </a:fontRef>
+        </p:style>
+        <p:txBody>
+          <a:bodyPr rtlCol="0" anchor="ctr"/>
+          <a:lstStyle/>
+          <a:p>
+            <a:pPr algn="ctr"/>
+          </a:p>
+        </p:txBody>
+      </p:sp>
+      <p:sp>
+        <p:nvSpPr>
+          <p:cNvPr id="4" name="Oval 3"/>
+          <p:cNvSpPr/>
+          <p:nvPr/>
+        </p:nvSpPr>
+        <p:spPr>
+          <a:xfrm>
+            <a:off x="914400" y="2011679"/>
+            <a:ext cx="640080" cy="640080"/>
+          </a:xfrm>
+          <a:prstGeom prst="ellipse">
+            <a:avLst/>
+          </a:prstGeom>
+          <a:solidFill>
+            <a:srgbClr val="0B1F33"/>
+          </a:solidFill>
+          <a:ln>
+            <a:noFill/>
+          </a:ln>
+          <a:effectLst/>
+        </p:spPr>
+        <p:style>
+          <a:lnRef idx="1">
+            <a:schemeClr val="accent1"/>
+          </a:lnRef>
+          <a:fillRef idx="3">
+            <a:schemeClr val="accent1"/>
+          </a:fillRef>
+          <a:effectRef idx="2">
+            <a:schemeClr val="accent1"/>
+          </a:effectRef>
+          <a:fontRef idx="minor">
+            <a:schemeClr val="lt1"/>
+          </a:fontRef>
+        </p:style>
+        <p:txBody>
+          <a:bodyPr rtlCol="0" anchor="ctr" wrap="square" lIns="0" tIns="0" rIns="0" bIns="0"/>
+          <a:lstStyle/>
+          <a:p>
+            <a:pPr algn="ctr"/>
+            <a:r>
+              <a:rPr sz="2000" b="1" i="0">
+                <a:solidFill>
+                  <a:srgbClr val="FFFFFF"/>
+                </a:solidFill>
+                <a:latin typeface="Calibri"/>
+              </a:rPr>
+              <a:t>1</a:t>
+            </a:r>
+          </a:p>
+        </p:txBody>
+      </p:sp>
+      <p:sp>
+        <p:nvSpPr>
+          <p:cNvPr id="5" name="TextBox 4"/>
           <p:cNvSpPr txBox="1"/>
           <p:nvPr/>
         </p:nvSpPr>
         <p:spPr>
           <a:xfrm>
-            <a:off x="731520" y="1828800"/>
-            <a:ext cx="10698480" cy="4389120"/>
+            <a:off x="1828800" y="1874519"/>
+            <a:ext cx="9418320" cy="1005840"/>
           </a:xfrm>
           <a:prstGeom prst="rect">
             <a:avLst/>
@@ -4556,129 +7737,375 @@
           <a:noFill/>
         </p:spPr>
         <p:txBody>
-          <a:bodyPr wrap="square">
+          <a:bodyPr wrap="square" anchor="ctr" lIns="0" tIns="0" rIns="0" bIns="0">
             <a:spAutoFit/>
           </a:bodyPr>
           <a:lstStyle/>
-          <a:p/>
-          <a:p>
-            <a:pPr>
+          <a:p>
+            <a:pPr algn="l"/>
+            <a:r>
+              <a:rPr sz="2000" b="1" i="0">
+                <a:solidFill>
+                  <a:srgbClr val="0B1F33"/>
+                </a:solidFill>
+                <a:latin typeface="Calibri"/>
+              </a:rPr>
+              <a:t>Ephemeral by default</a:t>
+            </a:r>
+          </a:p>
+          <a:p>
+            <a:pPr algn="l">
               <a:spcBef>
-                <a:spcPts val="800"/>
+                <a:spcPts val="600"/>
               </a:spcBef>
-              <a:defRPr b="1" sz="1500">
-                <a:solidFill>
-                  <a:srgbClr val="027AFF"/>
-                </a:solidFill>
-              </a:defRPr>
             </a:pPr>
             <a:r>
-              <a:t>[Input Transcript]</a:t>
-            </a:r>
-            <a:br/>
-            <a:r>
-              <a:rPr b="0" sz="1400">
-                <a:solidFill>
-                  <a:srgbClr val="101828"/>
-                </a:solidFill>
-              </a:rPr>
-              <a:t>  "It would probably be good if you could get the analysis over to me sometime before Friday. And maybe revisit the first section because I don't think we're quite there yet."</a:t>
-            </a:r>
-          </a:p>
-          <a:p>
-            <a:pPr>
+              <a:rPr sz="1600" b="0" i="0">
+                <a:solidFill>
+                  <a:srgbClr val="556575"/>
+                </a:solidFill>
+                <a:latin typeface="Calibri"/>
+              </a:rPr>
+              <a:t>Audio and screenshots are processed in memory and discarded unless the user chooses to save.</a:t>
+            </a:r>
+          </a:p>
+        </p:txBody>
+      </p:sp>
+      <p:sp>
+        <p:nvSpPr>
+          <p:cNvPr id="6" name="Rounded Rectangle 5"/>
+          <p:cNvSpPr/>
+          <p:nvPr/>
+        </p:nvSpPr>
+        <p:spPr>
+          <a:xfrm>
+            <a:off x="640080" y="3108960"/>
+            <a:ext cx="10881360" cy="1188720"/>
+          </a:xfrm>
+          <a:prstGeom prst="roundRect">
+            <a:avLst>
+              <a:gd name="adj" fmla="val 6000"/>
+            </a:avLst>
+          </a:prstGeom>
+          <a:solidFill>
+            <a:srgbClr val="FFFFFF"/>
+          </a:solidFill>
+          <a:ln w="15875">
+            <a:solidFill>
+              <a:srgbClr val="B8C4D0"/>
+            </a:solidFill>
+          </a:ln>
+          <a:effectLst/>
+        </p:spPr>
+        <p:style>
+          <a:lnRef idx="1">
+            <a:schemeClr val="accent1"/>
+          </a:lnRef>
+          <a:fillRef idx="3">
+            <a:schemeClr val="accent1"/>
+          </a:fillRef>
+          <a:effectRef idx="2">
+            <a:schemeClr val="accent1"/>
+          </a:effectRef>
+          <a:fontRef idx="minor">
+            <a:schemeClr val="lt1"/>
+          </a:fontRef>
+        </p:style>
+        <p:txBody>
+          <a:bodyPr rtlCol="0" anchor="ctr"/>
+          <a:lstStyle/>
+          <a:p>
+            <a:pPr algn="ctr"/>
+          </a:p>
+        </p:txBody>
+      </p:sp>
+      <p:sp>
+        <p:nvSpPr>
+          <p:cNvPr id="7" name="Oval 6"/>
+          <p:cNvSpPr/>
+          <p:nvPr/>
+        </p:nvSpPr>
+        <p:spPr>
+          <a:xfrm>
+            <a:off x="914400" y="3383279"/>
+            <a:ext cx="640080" cy="640080"/>
+          </a:xfrm>
+          <a:prstGeom prst="ellipse">
+            <a:avLst/>
+          </a:prstGeom>
+          <a:solidFill>
+            <a:srgbClr val="0B1F33"/>
+          </a:solidFill>
+          <a:ln>
+            <a:noFill/>
+          </a:ln>
+          <a:effectLst/>
+        </p:spPr>
+        <p:style>
+          <a:lnRef idx="1">
+            <a:schemeClr val="accent1"/>
+          </a:lnRef>
+          <a:fillRef idx="3">
+            <a:schemeClr val="accent1"/>
+          </a:fillRef>
+          <a:effectRef idx="2">
+            <a:schemeClr val="accent1"/>
+          </a:effectRef>
+          <a:fontRef idx="minor">
+            <a:schemeClr val="lt1"/>
+          </a:fontRef>
+        </p:style>
+        <p:txBody>
+          <a:bodyPr rtlCol="0" anchor="ctr" wrap="square" lIns="0" tIns="0" rIns="0" bIns="0"/>
+          <a:lstStyle/>
+          <a:p>
+            <a:pPr algn="ctr"/>
+            <a:r>
+              <a:rPr sz="2000" b="1" i="0">
+                <a:solidFill>
+                  <a:srgbClr val="FFFFFF"/>
+                </a:solidFill>
+                <a:latin typeface="Calibri"/>
+              </a:rPr>
+              <a:t>2</a:t>
+            </a:r>
+          </a:p>
+        </p:txBody>
+      </p:sp>
+      <p:sp>
+        <p:nvSpPr>
+          <p:cNvPr id="8" name="TextBox 7"/>
+          <p:cNvSpPr txBox="1"/>
+          <p:nvPr/>
+        </p:nvSpPr>
+        <p:spPr>
+          <a:xfrm>
+            <a:off x="1828800" y="3246120"/>
+            <a:ext cx="9418320" cy="1005840"/>
+          </a:xfrm>
+          <a:prstGeom prst="rect">
+            <a:avLst/>
+          </a:prstGeom>
+          <a:noFill/>
+        </p:spPr>
+        <p:txBody>
+          <a:bodyPr wrap="square" anchor="ctr" lIns="0" tIns="0" rIns="0" bIns="0">
+            <a:spAutoFit/>
+          </a:bodyPr>
+          <a:lstStyle/>
+          <a:p>
+            <a:pPr algn="l"/>
+            <a:r>
+              <a:rPr sz="2000" b="1" i="0">
+                <a:solidFill>
+                  <a:srgbClr val="0B1F33"/>
+                </a:solidFill>
+                <a:latin typeface="Calibri"/>
+              </a:rPr>
+              <a:t>Preferences, not logs</a:t>
+            </a:r>
+          </a:p>
+          <a:p>
+            <a:pPr algn="l">
               <a:spcBef>
-                <a:spcPts val="800"/>
+                <a:spcPts val="600"/>
               </a:spcBef>
-              <a:defRPr b="1" sz="1500">
-                <a:solidFill>
-                  <a:srgbClr val="027AFF"/>
-                </a:solidFill>
-              </a:defRPr>
             </a:pPr>
             <a:r>
-              <a:t>[Extracted Action Items]</a:t>
-            </a:r>
-            <a:br/>
-            <a:r>
-              <a:rPr b="0" sz="1400">
-                <a:solidFill>
-                  <a:srgbClr val="101828"/>
-                </a:solidFill>
-              </a:rPr>
-              <a:t>  1. [ ] Send analysis (Priority: HIGH)   |   2. [ ] Revisit first section (Priority: MEDIUM)</a:t>
-            </a:r>
-          </a:p>
-          <a:p>
-            <a:pPr>
+              <a:rPr sz="1600" b="0" i="0">
+                <a:solidFill>
+                  <a:srgbClr val="556575"/>
+                </a:solidFill>
+                <a:latin typeface="Calibri"/>
+              </a:rPr>
+              <a:t>Memory keeps user-approved settings such as “prefers short answers”, not conversation history.</a:t>
+            </a:r>
+          </a:p>
+        </p:txBody>
+      </p:sp>
+      <p:sp>
+        <p:nvSpPr>
+          <p:cNvPr id="9" name="Rounded Rectangle 8"/>
+          <p:cNvSpPr/>
+          <p:nvPr/>
+        </p:nvSpPr>
+        <p:spPr>
+          <a:xfrm>
+            <a:off x="640080" y="4480560"/>
+            <a:ext cx="10881360" cy="1188720"/>
+          </a:xfrm>
+          <a:prstGeom prst="roundRect">
+            <a:avLst>
+              <a:gd name="adj" fmla="val 6000"/>
+            </a:avLst>
+          </a:prstGeom>
+          <a:solidFill>
+            <a:srgbClr val="FFFFFF"/>
+          </a:solidFill>
+          <a:ln w="15875">
+            <a:solidFill>
+              <a:srgbClr val="B8C4D0"/>
+            </a:solidFill>
+          </a:ln>
+          <a:effectLst/>
+        </p:spPr>
+        <p:style>
+          <a:lnRef idx="1">
+            <a:schemeClr val="accent1"/>
+          </a:lnRef>
+          <a:fillRef idx="3">
+            <a:schemeClr val="accent1"/>
+          </a:fillRef>
+          <a:effectRef idx="2">
+            <a:schemeClr val="accent1"/>
+          </a:effectRef>
+          <a:fontRef idx="minor">
+            <a:schemeClr val="lt1"/>
+          </a:fontRef>
+        </p:style>
+        <p:txBody>
+          <a:bodyPr rtlCol="0" anchor="ctr"/>
+          <a:lstStyle/>
+          <a:p>
+            <a:pPr algn="ctr"/>
+          </a:p>
+        </p:txBody>
+      </p:sp>
+      <p:sp>
+        <p:nvSpPr>
+          <p:cNvPr id="10" name="Oval 9"/>
+          <p:cNvSpPr/>
+          <p:nvPr/>
+        </p:nvSpPr>
+        <p:spPr>
+          <a:xfrm>
+            <a:off x="914400" y="4754880"/>
+            <a:ext cx="640080" cy="640080"/>
+          </a:xfrm>
+          <a:prstGeom prst="ellipse">
+            <a:avLst/>
+          </a:prstGeom>
+          <a:solidFill>
+            <a:srgbClr val="0B1F33"/>
+          </a:solidFill>
+          <a:ln>
+            <a:noFill/>
+          </a:ln>
+          <a:effectLst/>
+        </p:spPr>
+        <p:style>
+          <a:lnRef idx="1">
+            <a:schemeClr val="accent1"/>
+          </a:lnRef>
+          <a:fillRef idx="3">
+            <a:schemeClr val="accent1"/>
+          </a:fillRef>
+          <a:effectRef idx="2">
+            <a:schemeClr val="accent1"/>
+          </a:effectRef>
+          <a:fontRef idx="minor">
+            <a:schemeClr val="lt1"/>
+          </a:fontRef>
+        </p:style>
+        <p:txBody>
+          <a:bodyPr rtlCol="0" anchor="ctr" wrap="square" lIns="0" tIns="0" rIns="0" bIns="0"/>
+          <a:lstStyle/>
+          <a:p>
+            <a:pPr algn="ctr"/>
+            <a:r>
+              <a:rPr sz="2000" b="1" i="0">
+                <a:solidFill>
+                  <a:srgbClr val="FFFFFF"/>
+                </a:solidFill>
+                <a:latin typeface="Calibri"/>
+              </a:rPr>
+              <a:t>3</a:t>
+            </a:r>
+          </a:p>
+        </p:txBody>
+      </p:sp>
+      <p:sp>
+        <p:nvSpPr>
+          <p:cNvPr id="11" name="TextBox 10"/>
+          <p:cNvSpPr txBox="1"/>
+          <p:nvPr/>
+        </p:nvSpPr>
+        <p:spPr>
+          <a:xfrm>
+            <a:off x="1828800" y="4617720"/>
+            <a:ext cx="9418320" cy="1005840"/>
+          </a:xfrm>
+          <a:prstGeom prst="rect">
+            <a:avLst/>
+          </a:prstGeom>
+          <a:noFill/>
+        </p:spPr>
+        <p:txBody>
+          <a:bodyPr wrap="square" anchor="ctr" lIns="0" tIns="0" rIns="0" bIns="0">
+            <a:spAutoFit/>
+          </a:bodyPr>
+          <a:lstStyle/>
+          <a:p>
+            <a:pPr algn="l"/>
+            <a:r>
+              <a:rPr sz="2000" b="1" i="0">
+                <a:solidFill>
+                  <a:srgbClr val="0B1F33"/>
+                </a:solidFill>
+                <a:latin typeface="Calibri"/>
+              </a:rPr>
+              <a:t>No cloud AI for core use</a:t>
+            </a:r>
+          </a:p>
+          <a:p>
+            <a:pPr algn="l">
               <a:spcBef>
-                <a:spcPts val="800"/>
+                <a:spcPts val="600"/>
               </a:spcBef>
-              <a:defRPr b="1" sz="1500">
-                <a:solidFill>
-                  <a:srgbClr val="027AFF"/>
-                </a:solidFill>
-              </a:defRPr>
             </a:pPr>
             <a:r>
-              <a:t>[Detected Deadlines]</a:t>
-            </a:r>
-            <a:br/>
-            <a:r>
-              <a:rPr b="0" sz="1400">
-                <a:solidFill>
-                  <a:srgbClr val="101828"/>
-                </a:solidFill>
-              </a:rPr>
-              <a:t>  • Friday (Resolved via deterministic hybrid rule + NPU inference)</a:t>
-            </a:r>
-          </a:p>
-          <a:p>
-            <a:pPr>
-              <a:spcBef>
-                <a:spcPts val="800"/>
-              </a:spcBef>
-              <a:defRPr b="1" sz="1500">
-                <a:solidFill>
-                  <a:srgbClr val="027AFF"/>
-                </a:solidFill>
-              </a:defRPr>
-            </a:pPr>
-            <a:r>
-              <a:t>[Possibility &amp; Evidence]</a:t>
-            </a:r>
-            <a:br/>
-            <a:r>
-              <a:rPr b="0" sz="1400">
-                <a:solidFill>
-                  <a:srgbClr val="101828"/>
-                </a:solidFill>
-              </a:rPr>
-              <a:t>  • Interpretation: Priority deliverable (82% confidence, evidence: 'get the analysis over before Friday')</a:t>
-            </a:r>
-          </a:p>
-          <a:p>
-            <a:pPr>
-              <a:spcBef>
-                <a:spcPts val="800"/>
-              </a:spcBef>
-              <a:defRPr b="1" sz="1500">
-                <a:solidFill>
-                  <a:srgbClr val="027AFF"/>
-                </a:solidFill>
-              </a:defRPr>
-            </a:pPr>
-            <a:r>
-              <a:t>[Ambiguity &amp; Clarification]</a:t>
-            </a:r>
-            <a:br/>
-            <a:r>
-              <a:rPr b="0" sz="1400">
-                <a:solidFill>
-                  <a:srgbClr val="101828"/>
-                </a:solidFill>
-              </a:rPr>
-              <a:t>  • Ambiguity: MEDIUM (revisions to section 1 unspecified) -&gt; Clarifying Question: 'What specific adjustments would you like made to section 1?'</a:t>
+              <a:rPr sz="1600" b="0" i="0">
+                <a:solidFill>
+                  <a:srgbClr val="556575"/>
+                </a:solidFill>
+                <a:latin typeface="Calibri"/>
+              </a:rPr>
+              <a:t>Local models handle inference. Offline behaviour will be tested before it is claimed.</a:t>
+            </a:r>
+          </a:p>
+        </p:txBody>
+      </p:sp>
+      <p:sp>
+        <p:nvSpPr>
+          <p:cNvPr id="12" name="TextBox 11"/>
+          <p:cNvSpPr txBox="1"/>
+          <p:nvPr/>
+        </p:nvSpPr>
+        <p:spPr>
+          <a:xfrm>
+            <a:off x="640080" y="5943600"/>
+            <a:ext cx="10881360" cy="457200"/>
+          </a:xfrm>
+          <a:prstGeom prst="rect">
+            <a:avLst/>
+          </a:prstGeom>
+          <a:noFill/>
+        </p:spPr>
+        <p:txBody>
+          <a:bodyPr wrap="square" anchor="t" lIns="0" tIns="0" rIns="0" bIns="0">
+            <a:spAutoFit/>
+          </a:bodyPr>
+          <a:lstStyle/>
+          <a:p>
+            <a:pPr algn="l"/>
+            <a:r>
+              <a:rPr sz="1400" b="0" i="1">
+                <a:solidFill>
+                  <a:srgbClr val="556575"/>
+                </a:solidFill>
+                <a:latin typeface="Calibri"/>
+              </a:rPr>
+              <a:t>These are design goals; the privacy features are not built yet.</a:t>
             </a:r>
           </a:p>
         </p:txBody>
@@ -4697,7 +8124,7 @@
     <p:bg>
       <p:bgPr>
         <a:solidFill>
-          <a:srgbClr val="F8FAFC"/>
+          <a:srgbClr val="F5F7FA"/>
         </a:solidFill>
         <a:effectLst/>
       </p:bgPr>
@@ -4717,8 +8144,8 @@
         </p:nvSpPr>
         <p:spPr>
           <a:xfrm>
-            <a:off x="731520" y="457200"/>
-            <a:ext cx="10698480" cy="1097280"/>
+            <a:off x="640080" y="457200"/>
+            <a:ext cx="10881360" cy="822960"/>
           </a:xfrm>
           <a:prstGeom prst="rect">
             <a:avLst/>
@@ -4726,46 +8153,308 @@
           <a:noFill/>
         </p:spPr>
         <p:txBody>
-          <a:bodyPr wrap="square" lIns="0" tIns="0" rIns="0" bIns="0">
+          <a:bodyPr wrap="square" anchor="ctr" lIns="0" tIns="0" rIns="0" bIns="0">
             <a:spAutoFit/>
           </a:bodyPr>
           <a:lstStyle/>
           <a:p>
-            <a:pPr>
-              <a:defRPr sz="1100" b="1">
-                <a:solidFill>
-                  <a:srgbClr val="E02020"/>
-                </a:solidFill>
-              </a:defRPr>
+            <a:pPr algn="l"/>
+            <a:r>
+              <a:rPr sz="3400" b="1" i="0">
+                <a:solidFill>
+                  <a:srgbClr val="0B1F33"/>
+                </a:solidFill>
+                <a:latin typeface="Cambria"/>
+              </a:rPr>
+              <a:t>Prototype today: real output from the rule-based engine</a:t>
+            </a:r>
+          </a:p>
+        </p:txBody>
+      </p:sp>
+      <p:sp>
+        <p:nvSpPr>
+          <p:cNvPr id="3" name="Rounded Rectangle 2"/>
+          <p:cNvSpPr/>
+          <p:nvPr/>
+        </p:nvSpPr>
+        <p:spPr>
+          <a:xfrm>
+            <a:off x="640080" y="1645920"/>
+            <a:ext cx="4480560" cy="3566160"/>
+          </a:xfrm>
+          <a:prstGeom prst="roundRect">
+            <a:avLst>
+              <a:gd name="adj" fmla="val 6000"/>
+            </a:avLst>
+          </a:prstGeom>
+          <a:solidFill>
+            <a:srgbClr val="FFFFFF"/>
+          </a:solidFill>
+          <a:ln w="15875">
+            <a:solidFill>
+              <a:srgbClr val="B8C4D0"/>
+            </a:solidFill>
+          </a:ln>
+          <a:effectLst/>
+        </p:spPr>
+        <p:style>
+          <a:lnRef idx="1">
+            <a:schemeClr val="accent1"/>
+          </a:lnRef>
+          <a:fillRef idx="3">
+            <a:schemeClr val="accent1"/>
+          </a:fillRef>
+          <a:effectRef idx="2">
+            <a:schemeClr val="accent1"/>
+          </a:effectRef>
+          <a:fontRef idx="minor">
+            <a:schemeClr val="lt1"/>
+          </a:fontRef>
+        </p:style>
+        <p:txBody>
+          <a:bodyPr rtlCol="0" anchor="t" wrap="square" lIns="274320" tIns="274320" rIns="274320" bIns="274320"/>
+          <a:lstStyle/>
+          <a:p>
+            <a:pPr algn="l"/>
+            <a:r>
+              <a:rPr sz="1300" b="1" i="0">
+                <a:solidFill>
+                  <a:srgbClr val="556575"/>
+                </a:solidFill>
+                <a:latin typeface="Calibri"/>
+              </a:rPr>
+              <a:t>Input</a:t>
+            </a:r>
+          </a:p>
+          <a:p>
+            <a:pPr algn="l">
+              <a:spcBef>
+                <a:spcPts val="600"/>
+              </a:spcBef>
             </a:pPr>
             <a:r>
-              <a:t>NEUROLENS | SNAPDRAGON AI LAB 2026</a:t>
-            </a:r>
-          </a:p>
-          <a:p>
-            <a:pPr>
-              <a:defRPr sz="2800" b="1">
-                <a:solidFill>
-                  <a:srgbClr val="101828"/>
-                </a:solidFill>
-              </a:defRPr>
+              <a:rPr sz="1600" b="0" i="1">
+                <a:solidFill>
+                  <a:srgbClr val="1B2A3A"/>
+                </a:solidFill>
+                <a:latin typeface="Cambria"/>
+              </a:rPr>
+              <a:t>“It would probably be good if you could get the analysis over to me sometime before Friday. And maybe revisit the first section because I don't think we're quite there yet.”</a:t>
+            </a:r>
+          </a:p>
+        </p:txBody>
+      </p:sp>
+      <p:sp>
+        <p:nvSpPr>
+          <p:cNvPr id="4" name="Rounded Rectangle 3"/>
+          <p:cNvSpPr/>
+          <p:nvPr/>
+        </p:nvSpPr>
+        <p:spPr>
+          <a:xfrm>
+            <a:off x="5394960" y="1645920"/>
+            <a:ext cx="6126480" cy="3566160"/>
+          </a:xfrm>
+          <a:prstGeom prst="roundRect">
+            <a:avLst>
+              <a:gd name="adj" fmla="val 6000"/>
+            </a:avLst>
+          </a:prstGeom>
+          <a:solidFill>
+            <a:srgbClr val="FFFFFF"/>
+          </a:solidFill>
+          <a:ln w="25400">
+            <a:solidFill>
+              <a:srgbClr val="0E8F83"/>
+            </a:solidFill>
+          </a:ln>
+          <a:effectLst/>
+        </p:spPr>
+        <p:style>
+          <a:lnRef idx="1">
+            <a:schemeClr val="accent1"/>
+          </a:lnRef>
+          <a:fillRef idx="3">
+            <a:schemeClr val="accent1"/>
+          </a:fillRef>
+          <a:effectRef idx="2">
+            <a:schemeClr val="accent1"/>
+          </a:effectRef>
+          <a:fontRef idx="minor">
+            <a:schemeClr val="lt1"/>
+          </a:fontRef>
+        </p:style>
+        <p:txBody>
+          <a:bodyPr rtlCol="0" anchor="t" wrap="square" lIns="320040" tIns="228600" rIns="320040" bIns="182880"/>
+          <a:lstStyle/>
+          <a:p>
+            <a:pPr algn="l"/>
+            <a:r>
+              <a:rPr sz="1300" b="1" i="0">
+                <a:solidFill>
+                  <a:srgbClr val="0E8F83"/>
+                </a:solidFill>
+                <a:latin typeface="Calibri"/>
+              </a:rPr>
+              <a:t>Output</a:t>
+            </a:r>
+          </a:p>
+          <a:p>
+            <a:pPr algn="l">
+              <a:spcBef>
+                <a:spcPts val="600"/>
+              </a:spcBef>
             </a:pPr>
             <a:r>
-              <a:t>Target Metrics &amp; Evaluation Plan</a:t>
-            </a:r>
-          </a:p>
-        </p:txBody>
-      </p:sp>
-      <p:sp>
-        <p:nvSpPr>
-          <p:cNvPr id="3" name="TextBox 2"/>
+              <a:rPr sz="1300" b="1" i="0">
+                <a:solidFill>
+                  <a:srgbClr val="556575"/>
+                </a:solidFill>
+                <a:latin typeface="Calibri"/>
+              </a:rPr>
+              <a:t>Actions</a:t>
+            </a:r>
+          </a:p>
+          <a:p>
+            <a:pPr algn="l">
+              <a:spcBef>
+                <a:spcPts val="600"/>
+              </a:spcBef>
+            </a:pPr>
+            <a:r>
+              <a:rPr sz="1600" b="0" i="0">
+                <a:solidFill>
+                  <a:srgbClr val="1B2A3A"/>
+                </a:solidFill>
+                <a:latin typeface="Calibri"/>
+              </a:rPr>
+              <a:t>[ ]  get the analysis over to me  (high)</a:t>
+            </a:r>
+          </a:p>
+          <a:p>
+            <a:pPr algn="l">
+              <a:spcBef>
+                <a:spcPts val="600"/>
+              </a:spcBef>
+            </a:pPr>
+            <a:r>
+              <a:rPr sz="1600" b="0" i="0">
+                <a:solidFill>
+                  <a:srgbClr val="1B2A3A"/>
+                </a:solidFill>
+                <a:latin typeface="Calibri"/>
+              </a:rPr>
+              <a:t>[ ]  revisit the first section  (medium)</a:t>
+            </a:r>
+          </a:p>
+          <a:p>
+            <a:pPr algn="l">
+              <a:spcBef>
+                <a:spcPts val="600"/>
+              </a:spcBef>
+            </a:pPr>
+            <a:r>
+              <a:rPr sz="1300" b="1" i="0">
+                <a:solidFill>
+                  <a:srgbClr val="556575"/>
+                </a:solidFill>
+                <a:latin typeface="Calibri"/>
+              </a:rPr>
+              <a:t>Deadline</a:t>
+            </a:r>
+          </a:p>
+          <a:p>
+            <a:pPr algn="l">
+              <a:spcBef>
+                <a:spcPts val="600"/>
+              </a:spcBef>
+            </a:pPr>
+            <a:r>
+              <a:rPr sz="1600" b="0" i="0">
+                <a:solidFill>
+                  <a:srgbClr val="1B2A3A"/>
+                </a:solidFill>
+                <a:latin typeface="Calibri"/>
+              </a:rPr>
+              <a:t>Friday</a:t>
+            </a:r>
+          </a:p>
+          <a:p>
+            <a:pPr algn="l">
+              <a:spcBef>
+                <a:spcPts val="600"/>
+              </a:spcBef>
+            </a:pPr>
+            <a:r>
+              <a:rPr sz="1300" b="1" i="0">
+                <a:solidFill>
+                  <a:srgbClr val="556575"/>
+                </a:solidFill>
+                <a:latin typeface="Calibri"/>
+              </a:rPr>
+              <a:t>Ambiguity</a:t>
+            </a:r>
+          </a:p>
+          <a:p>
+            <a:pPr algn="l">
+              <a:spcBef>
+                <a:spcPts val="600"/>
+              </a:spcBef>
+            </a:pPr>
+            <a:r>
+              <a:rPr sz="1600" b="1" i="0">
+                <a:solidFill>
+                  <a:srgbClr val="C04B3B"/>
+                </a:solidFill>
+                <a:latin typeface="Calibri"/>
+              </a:rPr>
+              <a:t>MEDIUM</a:t>
+            </a:r>
+          </a:p>
+          <a:p>
+            <a:pPr algn="l">
+              <a:spcBef>
+                <a:spcPts val="600"/>
+              </a:spcBef>
+            </a:pPr>
+            <a:r>
+              <a:rPr sz="1300" b="1" i="0">
+                <a:solidFill>
+                  <a:srgbClr val="556575"/>
+                </a:solidFill>
+                <a:latin typeface="Calibri"/>
+              </a:rPr>
+              <a:t>Clarifying question</a:t>
+            </a:r>
+          </a:p>
+          <a:p>
+            <a:pPr algn="l">
+              <a:spcBef>
+                <a:spcPts val="600"/>
+              </a:spcBef>
+            </a:pPr>
+            <a:r>
+              <a:rPr sz="1600" b="0" i="1">
+                <a:solidFill>
+                  <a:srgbClr val="1B2A3A"/>
+                </a:solidFill>
+                <a:latin typeface="Calibri"/>
+              </a:rPr>
+              <a:t>“Which part should be changed, and how?”</a:t>
+            </a:r>
+          </a:p>
+        </p:txBody>
+      </p:sp>
+      <p:sp>
+        <p:nvSpPr>
+          <p:cNvPr id="5" name="TextBox 4"/>
           <p:cNvSpPr txBox="1"/>
           <p:nvPr/>
         </p:nvSpPr>
         <p:spPr>
           <a:xfrm>
-            <a:off x="731520" y="1828800"/>
-            <a:ext cx="10698480" cy="4389120"/>
+            <a:off x="640080" y="5486400"/>
+            <a:ext cx="10881360" cy="548640"/>
           </a:xfrm>
           <a:prstGeom prst="rect">
             <a:avLst/>
@@ -4773,101 +8462,20 @@
           <a:noFill/>
         </p:spPr>
         <p:txBody>
-          <a:bodyPr wrap="square">
+          <a:bodyPr wrap="square" anchor="t" lIns="0" tIns="0" rIns="0" bIns="0">
             <a:spAutoFit/>
           </a:bodyPr>
           <a:lstStyle/>
-          <a:p/>
-          <a:p>
-            <a:pPr>
-              <a:spcBef>
-                <a:spcPts val="1200"/>
-              </a:spcBef>
-              <a:defRPr b="1" sz="1600">
-                <a:solidFill>
-                  <a:srgbClr val="101828"/>
-                </a:solidFill>
-              </a:defRPr>
-            </a:pPr>
-            <a:r>
-              <a:t>• Task Extraction Precision &amp; Recall: </a:t>
-            </a:r>
-            <a:r>
-              <a:rPr b="0">
-                <a:solidFill>
-                  <a:srgbClr val="475467"/>
-                </a:solidFill>
-              </a:rPr>
-              <a:t>&gt;90% benchmark across controlled conversational and lecture transcripts.</a:t>
-            </a:r>
-          </a:p>
-          <a:p>
-            <a:pPr>
-              <a:spcBef>
-                <a:spcPts val="1200"/>
-              </a:spcBef>
-              <a:defRPr b="1" sz="1600">
-                <a:solidFill>
-                  <a:srgbClr val="101828"/>
-                </a:solidFill>
-              </a:defRPr>
-            </a:pPr>
-            <a:r>
-              <a:t>• Deadline Extraction Accuracy: </a:t>
-            </a:r>
-            <a:r>
-              <a:rPr b="0">
-                <a:solidFill>
-                  <a:srgbClr val="475467"/>
-                </a:solidFill>
-              </a:rPr>
-              <a:t>&gt;95% accuracy via dual neural + deterministic rule engine.</a:t>
-            </a:r>
-          </a:p>
-          <a:p>
-            <a:pPr>
-              <a:spcBef>
-                <a:spcPts val="1200"/>
-              </a:spcBef>
-              <a:defRPr b="1" sz="1600">
-                <a:solidFill>
-                  <a:srgbClr val="101828"/>
-                </a:solidFill>
-              </a:defRPr>
-            </a:pPr>
-            <a:r>
-              <a:t>• End-to-End Latency Target: </a:t>
-            </a:r>
-            <a:r>
-              <a:rPr b="0">
-                <a:solidFill>
-                  <a:srgbClr val="475467"/>
-                </a:solidFill>
-              </a:rPr>
-              <a:t>Sub-second turnaround on Snapdragon X NPU platform for real-time responsiveness.</a:t>
-            </a:r>
-          </a:p>
-          <a:p>
-            <a:pPr>
-              <a:spcBef>
-                <a:spcPts val="1200"/>
-              </a:spcBef>
-              <a:defRPr b="1" sz="1600">
-                <a:solidFill>
-                  <a:srgbClr val="101828"/>
-                </a:solidFill>
-              </a:defRPr>
-            </a:pPr>
-            <a:r>
-              <a:t>• Honest Benchmark Policy: </a:t>
-            </a:r>
-            <a:r>
-              <a:rPr b="0">
-                <a:solidFill>
-                  <a:srgbClr val="475467"/>
-                </a:solidFill>
-              </a:rPr>
-              <a:t>All latency and token metrics are documented as measured directly on target Snapdragon hardware, without inflated cloud assumptions.</a:t>
+          <a:p>
+            <a:pPr algn="l"/>
+            <a:r>
+              <a:rPr sz="1300" b="0" i="1">
+                <a:solidFill>
+                  <a:srgbClr val="556575"/>
+                </a:solidFill>
+                <a:latin typeface="Calibri"/>
+              </a:rPr>
+              <a:t>Produced on CPU by the rule engine (python cognitive_compiler.py --no-model). The local-model path has not yet been run on Snapdragon.</a:t>
             </a:r>
           </a:p>
         </p:txBody>
